--- a/publication/EARTH_presentation.pptx
+++ b/publication/EARTH_presentation.pptx
@@ -134,13 +134,37 @@
 <file path=ppt/revisionInfo.xml><?xml version="1.0" encoding="utf-8"?>
 <p1510:revInfo xmlns:a="http://schemas.openxmlformats.org/drawingml/2006/main" xmlns:r="http://schemas.openxmlformats.org/officeDocument/2006/relationships" xmlns:p1510="http://schemas.microsoft.com/office/powerpoint/2015/10/main">
   <p1510:revLst>
-    <p1510:client id="{F2590C98-17EE-4B40-B4C1-D5E61138AE41}" v="843" dt="2026-08-08T14:44:29.856"/>
+    <p1510:client id="{0729CCF5-1BFF-44A5-9BA5-7CE0202E4242}" v="2" dt="2026-08-10T13:43:57.899"/>
   </p1510:revLst>
 </p1510:revInfo>
 </file>
 
 <file path=ppt/changesInfos/changesInfo1.xml><?xml version="1.0" encoding="utf-8"?>
 <pc:chgInfo xmlns:a="http://schemas.openxmlformats.org/drawingml/2006/main" xmlns:r="http://schemas.openxmlformats.org/officeDocument/2006/relationships" xmlns:ac="http://schemas.microsoft.com/office/drawing/2013/main/command" xmlns:pc="http://schemas.microsoft.com/office/powerpoint/2013/main/command">
+  <pc:docChgLst>
+    <pc:chgData name="Tsz Nam Chan" userId="d72bc0ce159372cc" providerId="LiveId" clId="{D0A54EB6-4CA2-42C5-ABC6-C64AAD2F7BCD}"/>
+    <pc:docChg chg="modSld">
+      <pc:chgData name="Tsz Nam Chan" userId="d72bc0ce159372cc" providerId="LiveId" clId="{D0A54EB6-4CA2-42C5-ABC6-C64AAD2F7BCD}" dt="2026-08-10T13:43:57.899" v="1" actId="20577"/>
+      <pc:docMkLst>
+        <pc:docMk/>
+      </pc:docMkLst>
+      <pc:sldChg chg="modSp">
+        <pc:chgData name="Tsz Nam Chan" userId="d72bc0ce159372cc" providerId="LiveId" clId="{D0A54EB6-4CA2-42C5-ABC6-C64AAD2F7BCD}" dt="2026-08-10T13:43:57.899" v="1" actId="20577"/>
+        <pc:sldMkLst>
+          <pc:docMk/>
+          <pc:sldMk cId="1944472154" sldId="268"/>
+        </pc:sldMkLst>
+        <pc:spChg chg="mod">
+          <ac:chgData name="Tsz Nam Chan" userId="d72bc0ce159372cc" providerId="LiveId" clId="{D0A54EB6-4CA2-42C5-ABC6-C64AAD2F7BCD}" dt="2026-08-10T13:43:57.899" v="1" actId="20577"/>
+          <ac:spMkLst>
+            <pc:docMk/>
+            <pc:sldMk cId="1944472154" sldId="268"/>
+            <ac:spMk id="8" creationId="{07E56B51-3549-54F9-FFFB-B4DA5CB7D2FF}"/>
+          </ac:spMkLst>
+        </pc:spChg>
+      </pc:sldChg>
+    </pc:docChg>
+  </pc:docChgLst>
   <pc:docChgLst>
     <pc:chgData name="Tsz Nam Chan" userId="d72bc0ce159372cc" providerId="LiveId" clId="{7EA772CB-F43F-45EA-8D4F-488304E9E5E6}"/>
     <pc:docChg chg="undo redo custSel addSld delSld modSld">
@@ -263,14 +287,6 @@
             <ac:spMk id="2" creationId="{41B7018D-896E-B61B-A804-C4E2B49E668E}"/>
           </ac:spMkLst>
         </pc:spChg>
-        <pc:spChg chg="del">
-          <ac:chgData name="Tsz Nam Chan" userId="d72bc0ce159372cc" providerId="LiveId" clId="{7EA772CB-F43F-45EA-8D4F-488304E9E5E6}" dt="2026-08-08T13:18:24.991" v="1084" actId="478"/>
-          <ac:spMkLst>
-            <pc:docMk/>
-            <pc:sldMk cId="2385365285" sldId="266"/>
-            <ac:spMk id="3" creationId="{2CF251EA-E90A-7CE4-09B5-D099868C48B8}"/>
-          </ac:spMkLst>
-        </pc:spChg>
         <pc:spChg chg="add mod">
           <ac:chgData name="Tsz Nam Chan" userId="d72bc0ce159372cc" providerId="LiveId" clId="{7EA772CB-F43F-45EA-8D4F-488304E9E5E6}" dt="2026-08-08T14:16:39.044" v="3352" actId="20577"/>
           <ac:spMkLst>
@@ -318,38 +334,6 @@
             <ac:picMk id="5" creationId="{9EFF441D-4483-C19D-368D-CE53F2B8A759}"/>
           </ac:picMkLst>
         </pc:picChg>
-        <pc:picChg chg="add del mod ord">
-          <ac:chgData name="Tsz Nam Chan" userId="d72bc0ce159372cc" providerId="LiveId" clId="{7EA772CB-F43F-45EA-8D4F-488304E9E5E6}" dt="2026-08-08T13:23:32.474" v="1266" actId="22"/>
-          <ac:picMkLst>
-            <pc:docMk/>
-            <pc:sldMk cId="3349179287" sldId="267"/>
-            <ac:picMk id="5" creationId="{C7780D6A-CE1E-4E71-DAA1-4B327E520572}"/>
-          </ac:picMkLst>
-        </pc:picChg>
-        <pc:picChg chg="add del mod">
-          <ac:chgData name="Tsz Nam Chan" userId="d72bc0ce159372cc" providerId="LiveId" clId="{7EA772CB-F43F-45EA-8D4F-488304E9E5E6}" dt="2026-08-08T14:40:46.461" v="3367" actId="478"/>
-          <ac:picMkLst>
-            <pc:docMk/>
-            <pc:sldMk cId="3349179287" sldId="267"/>
-            <ac:picMk id="7" creationId="{87D40674-3E7D-5A93-34CA-3C778DD37D0D}"/>
-          </ac:picMkLst>
-        </pc:picChg>
-        <pc:picChg chg="add del mod">
-          <ac:chgData name="Tsz Nam Chan" userId="d72bc0ce159372cc" providerId="LiveId" clId="{7EA772CB-F43F-45EA-8D4F-488304E9E5E6}" dt="2026-08-08T13:30:28.815" v="1597" actId="21"/>
-          <ac:picMkLst>
-            <pc:docMk/>
-            <pc:sldMk cId="3349179287" sldId="267"/>
-            <ac:picMk id="9" creationId="{71B45DC0-3982-DCFD-5ACF-3FD29E950E1D}"/>
-          </ac:picMkLst>
-        </pc:picChg>
-        <pc:picChg chg="add del mod">
-          <ac:chgData name="Tsz Nam Chan" userId="d72bc0ce159372cc" providerId="LiveId" clId="{7EA772CB-F43F-45EA-8D4F-488304E9E5E6}" dt="2026-08-08T13:31:53.516" v="1613" actId="21"/>
-          <ac:picMkLst>
-            <pc:docMk/>
-            <pc:sldMk cId="3349179287" sldId="267"/>
-            <ac:picMk id="11" creationId="{D2074645-5BD4-4FF3-54C7-9CCB1AF32C35}"/>
-          </ac:picMkLst>
-        </pc:picChg>
       </pc:sldChg>
       <pc:sldChg chg="addSp delSp modSp new mod">
         <pc:chgData name="Tsz Nam Chan" userId="d72bc0ce159372cc" providerId="LiveId" clId="{7EA772CB-F43F-45EA-8D4F-488304E9E5E6}" dt="2026-08-08T14:41:39.169" v="3376" actId="1076"/>
@@ -363,14 +347,6 @@
             <pc:docMk/>
             <pc:sldMk cId="1944472154" sldId="268"/>
             <ac:spMk id="2" creationId="{8A063F72-C805-3339-0B9C-2C90A265E53A}"/>
-          </ac:spMkLst>
-        </pc:spChg>
-        <pc:spChg chg="del">
-          <ac:chgData name="Tsz Nam Chan" userId="d72bc0ce159372cc" providerId="LiveId" clId="{7EA772CB-F43F-45EA-8D4F-488304E9E5E6}" dt="2026-08-08T13:30:10.068" v="1591" actId="478"/>
-          <ac:spMkLst>
-            <pc:docMk/>
-            <pc:sldMk cId="1944472154" sldId="268"/>
-            <ac:spMk id="3" creationId="{F2750C53-8BE3-336C-2DFB-9A1D6A4F0D72}"/>
           </ac:spMkLst>
         </pc:spChg>
         <pc:spChg chg="add mod">
@@ -387,52 +363,6 @@
             <pc:docMk/>
             <pc:sldMk cId="1944472154" sldId="268"/>
             <ac:picMk id="4" creationId="{EB6F4D75-BBF7-654D-8B4C-34DBD221C0FB}"/>
-          </ac:picMkLst>
-        </pc:picChg>
-        <pc:picChg chg="add del mod">
-          <ac:chgData name="Tsz Nam Chan" userId="d72bc0ce159372cc" providerId="LiveId" clId="{7EA772CB-F43F-45EA-8D4F-488304E9E5E6}" dt="2026-08-08T13:30:25.446" v="1594" actId="21"/>
-          <ac:picMkLst>
-            <pc:docMk/>
-            <pc:sldMk cId="1944472154" sldId="268"/>
-            <ac:picMk id="5" creationId="{48055432-1465-B7B2-07BA-38CAEB30C5BC}"/>
-          </ac:picMkLst>
-        </pc:picChg>
-        <pc:picChg chg="add del mod">
-          <ac:chgData name="Tsz Nam Chan" userId="d72bc0ce159372cc" providerId="LiveId" clId="{7EA772CB-F43F-45EA-8D4F-488304E9E5E6}" dt="2026-08-08T13:31:35.278" v="1608" actId="21"/>
-          <ac:picMkLst>
-            <pc:docMk/>
-            <pc:sldMk cId="1944472154" sldId="268"/>
-            <ac:picMk id="7" creationId="{D1ED12A7-78E7-059D-C6CA-E09CA19BCC8F}"/>
-          </ac:picMkLst>
-        </pc:picChg>
-        <pc:picChg chg="add del mod">
-          <ac:chgData name="Tsz Nam Chan" userId="d72bc0ce159372cc" providerId="LiveId" clId="{7EA772CB-F43F-45EA-8D4F-488304E9E5E6}" dt="2026-08-08T14:41:06.969" v="3371" actId="478"/>
-          <ac:picMkLst>
-            <pc:docMk/>
-            <pc:sldMk cId="1944472154" sldId="268"/>
-            <ac:picMk id="10" creationId="{A2701AD3-F9B9-0529-1D35-3ABF87C9365B}"/>
-          </ac:picMkLst>
-        </pc:picChg>
-      </pc:sldChg>
-      <pc:sldChg chg="new del">
-        <pc:chgData name="Tsz Nam Chan" userId="d72bc0ce159372cc" providerId="LiveId" clId="{7EA772CB-F43F-45EA-8D4F-488304E9E5E6}" dt="2026-08-08T13:22:55.833" v="1263" actId="47"/>
-        <pc:sldMkLst>
-          <pc:docMk/>
-          <pc:sldMk cId="3490494453" sldId="268"/>
-        </pc:sldMkLst>
-      </pc:sldChg>
-      <pc:sldChg chg="addSp delSp new del mod">
-        <pc:chgData name="Tsz Nam Chan" userId="d72bc0ce159372cc" providerId="LiveId" clId="{7EA772CB-F43F-45EA-8D4F-488304E9E5E6}" dt="2026-08-08T13:30:40.732" v="1601" actId="47"/>
-        <pc:sldMkLst>
-          <pc:docMk/>
-          <pc:sldMk cId="33128246" sldId="269"/>
-        </pc:sldMkLst>
-        <pc:picChg chg="add del">
-          <ac:chgData name="Tsz Nam Chan" userId="d72bc0ce159372cc" providerId="LiveId" clId="{7EA772CB-F43F-45EA-8D4F-488304E9E5E6}" dt="2026-08-08T13:30:36.597" v="1600" actId="21"/>
-          <ac:picMkLst>
-            <pc:docMk/>
-            <pc:sldMk cId="33128246" sldId="269"/>
-            <ac:picMk id="5" creationId="{C7033BD2-1006-6F31-DEF7-F75871CE9787}"/>
           </ac:picMkLst>
         </pc:picChg>
       </pc:sldChg>
@@ -473,14 +403,6 @@
             <ac:spMk id="2" creationId="{9A8ACCC6-F57D-C529-CDCA-289097D39145}"/>
           </ac:spMkLst>
         </pc:spChg>
-        <pc:spChg chg="del">
-          <ac:chgData name="Tsz Nam Chan" userId="d72bc0ce159372cc" providerId="LiveId" clId="{7EA772CB-F43F-45EA-8D4F-488304E9E5E6}" dt="2026-08-08T13:43:45.639" v="2158" actId="478"/>
-          <ac:spMkLst>
-            <pc:docMk/>
-            <pc:sldMk cId="3283270721" sldId="270"/>
-            <ac:spMk id="3" creationId="{47599815-597D-F475-00A7-82DCAE7D1C81}"/>
-          </ac:spMkLst>
-        </pc:spChg>
         <pc:spChg chg="add mod">
           <ac:chgData name="Tsz Nam Chan" userId="d72bc0ce159372cc" providerId="LiveId" clId="{7EA772CB-F43F-45EA-8D4F-488304E9E5E6}" dt="2026-08-08T13:49:31.631" v="2280" actId="20577"/>
           <ac:spMkLst>
@@ -489,36 +411,12 @@
             <ac:spMk id="12" creationId="{B9464F45-0A2C-531C-68CF-7F69E3E3E606}"/>
           </ac:spMkLst>
         </pc:spChg>
-        <pc:picChg chg="add del mod">
-          <ac:chgData name="Tsz Nam Chan" userId="d72bc0ce159372cc" providerId="LiveId" clId="{7EA772CB-F43F-45EA-8D4F-488304E9E5E6}" dt="2026-08-08T13:42:58.911" v="2154" actId="478"/>
-          <ac:picMkLst>
-            <pc:docMk/>
-            <pc:sldMk cId="3283270721" sldId="270"/>
-            <ac:picMk id="5" creationId="{3BDC168E-0866-AF12-FAE2-67174D0D2F61}"/>
-          </ac:picMkLst>
-        </pc:picChg>
         <pc:picChg chg="add mod">
           <ac:chgData name="Tsz Nam Chan" userId="d72bc0ce159372cc" providerId="LiveId" clId="{7EA772CB-F43F-45EA-8D4F-488304E9E5E6}" dt="2026-08-08T13:50:05.285" v="2287" actId="1076"/>
           <ac:picMkLst>
             <pc:docMk/>
             <pc:sldMk cId="3283270721" sldId="270"/>
             <ac:picMk id="7" creationId="{03A47730-138C-B1D1-BD5E-C09BD110BC15}"/>
-          </ac:picMkLst>
-        </pc:picChg>
-        <pc:picChg chg="add del mod">
-          <ac:chgData name="Tsz Nam Chan" userId="d72bc0ce159372cc" providerId="LiveId" clId="{7EA772CB-F43F-45EA-8D4F-488304E9E5E6}" dt="2026-08-08T13:47:40.807" v="2201" actId="21"/>
-          <ac:picMkLst>
-            <pc:docMk/>
-            <pc:sldMk cId="3283270721" sldId="270"/>
-            <ac:picMk id="9" creationId="{E6BF3F65-BD95-56C8-CEB8-D1BF1C407473}"/>
-          </ac:picMkLst>
-        </pc:picChg>
-        <pc:picChg chg="add del mod">
-          <ac:chgData name="Tsz Nam Chan" userId="d72bc0ce159372cc" providerId="LiveId" clId="{7EA772CB-F43F-45EA-8D4F-488304E9E5E6}" dt="2026-08-08T13:47:40.807" v="2201" actId="21"/>
-          <ac:picMkLst>
-            <pc:docMk/>
-            <pc:sldMk cId="3283270721" sldId="270"/>
-            <ac:picMk id="11" creationId="{2E08ACC3-BAB6-0616-55CC-122B341A372E}"/>
           </ac:picMkLst>
         </pc:picChg>
         <pc:picChg chg="add mod">
@@ -560,22 +458,6 @@
             <ac:spMk id="3" creationId="{F4435D64-FA90-DDFF-2E30-D38C1E2BE412}"/>
           </ac:spMkLst>
         </pc:spChg>
-        <pc:picChg chg="add del mod">
-          <ac:chgData name="Tsz Nam Chan" userId="d72bc0ce159372cc" providerId="LiveId" clId="{7EA772CB-F43F-45EA-8D4F-488304E9E5E6}" dt="2026-08-08T13:49:28.001" v="2279" actId="21"/>
-          <ac:picMkLst>
-            <pc:docMk/>
-            <pc:sldMk cId="2851891223" sldId="271"/>
-            <ac:picMk id="5" creationId="{B1992439-3A42-FFF4-749B-D1AAFCCA0BFA}"/>
-          </ac:picMkLst>
-        </pc:picChg>
-        <pc:picChg chg="add del mod">
-          <ac:chgData name="Tsz Nam Chan" userId="d72bc0ce159372cc" providerId="LiveId" clId="{7EA772CB-F43F-45EA-8D4F-488304E9E5E6}" dt="2026-08-08T13:49:28.001" v="2279" actId="21"/>
-          <ac:picMkLst>
-            <pc:docMk/>
-            <pc:sldMk cId="2851891223" sldId="271"/>
-            <ac:picMk id="7" creationId="{AD478420-94A0-84EB-C038-02B475CE3E91}"/>
-          </ac:picMkLst>
-        </pc:picChg>
       </pc:sldChg>
       <pc:sldChg chg="addSp delSp modSp new mod">
         <pc:chgData name="Tsz Nam Chan" userId="d72bc0ce159372cc" providerId="LiveId" clId="{7EA772CB-F43F-45EA-8D4F-488304E9E5E6}" dt="2026-08-08T14:44:29.856" v="3384" actId="113"/>
@@ -597,45 +479,6 @@
             <pc:docMk/>
             <pc:sldMk cId="300967349" sldId="272"/>
             <ac:spMk id="3" creationId="{3BA5DA79-017C-8097-C1C1-6098F5C875CA}"/>
-          </ac:spMkLst>
-        </pc:spChg>
-        <pc:spChg chg="add del">
-          <ac:chgData name="Tsz Nam Chan" userId="d72bc0ce159372cc" providerId="LiveId" clId="{7EA772CB-F43F-45EA-8D4F-488304E9E5E6}" dt="2026-08-08T14:06:54.733" v="3272" actId="478"/>
-          <ac:spMkLst>
-            <pc:docMk/>
-            <pc:sldMk cId="300967349" sldId="272"/>
-            <ac:spMk id="5" creationId="{BD5DB816-6EDB-7B84-F04A-59DE0A473322}"/>
-          </ac:spMkLst>
-        </pc:spChg>
-        <pc:spChg chg="add del">
-          <ac:chgData name="Tsz Nam Chan" userId="d72bc0ce159372cc" providerId="LiveId" clId="{7EA772CB-F43F-45EA-8D4F-488304E9E5E6}" dt="2026-08-08T14:07:05.469" v="3274" actId="22"/>
-          <ac:spMkLst>
-            <pc:docMk/>
-            <pc:sldMk cId="300967349" sldId="272"/>
-            <ac:spMk id="7" creationId="{7BE4E788-EA5F-6A27-A815-30AF40825709}"/>
-          </ac:spMkLst>
-        </pc:spChg>
-      </pc:sldChg>
-      <pc:sldChg chg="delSp new del mod">
-        <pc:chgData name="Tsz Nam Chan" userId="d72bc0ce159372cc" providerId="LiveId" clId="{7EA772CB-F43F-45EA-8D4F-488304E9E5E6}" dt="2026-08-08T14:06:48.257" v="3270" actId="47"/>
-        <pc:sldMkLst>
-          <pc:docMk/>
-          <pc:sldMk cId="801820537" sldId="273"/>
-        </pc:sldMkLst>
-        <pc:spChg chg="del">
-          <ac:chgData name="Tsz Nam Chan" userId="d72bc0ce159372cc" providerId="LiveId" clId="{7EA772CB-F43F-45EA-8D4F-488304E9E5E6}" dt="2026-08-08T14:05:59.716" v="3269" actId="478"/>
-          <ac:spMkLst>
-            <pc:docMk/>
-            <pc:sldMk cId="801820537" sldId="273"/>
-            <ac:spMk id="2" creationId="{F1705246-5AC7-262C-6945-D870D31C97AA}"/>
-          </ac:spMkLst>
-        </pc:spChg>
-        <pc:spChg chg="del">
-          <ac:chgData name="Tsz Nam Chan" userId="d72bc0ce159372cc" providerId="LiveId" clId="{7EA772CB-F43F-45EA-8D4F-488304E9E5E6}" dt="2026-08-08T14:05:59.716" v="3269" actId="478"/>
-          <ac:spMkLst>
-            <pc:docMk/>
-            <pc:sldMk cId="801820537" sldId="273"/>
-            <ac:spMk id="3" creationId="{01B168E4-7B51-36A6-74E6-628CE76DF126}"/>
           </ac:spMkLst>
         </pc:spChg>
       </pc:sldChg>
@@ -733,7 +576,7 @@
           <a:p>
             <a:fld id="{DB27F06F-BA07-4A0F-A4F6-CE78195A93D7}" type="datetimeFigureOut">
               <a:rPr lang="zh-Hans-HK" altLang="en-US" smtClean="0"/>
-              <a:t>8/8/2026</a:t>
+              <a:t>08/10/2026</a:t>
             </a:fld>
             <a:endParaRPr lang="zh-Hans-HK" altLang="en-US"/>
           </a:p>
@@ -1150,7 +993,7 @@
           <a:p>
             <a:fld id="{A702C107-3D46-4C34-AD55-6B06F342152C}" type="datetime1">
               <a:rPr lang="zh-Hans-HK" altLang="en-US" smtClean="0"/>
-              <a:t>8/8/2026</a:t>
+              <a:t>08/10/2026</a:t>
             </a:fld>
             <a:endParaRPr lang="zh-Hans-HK" altLang="en-US"/>
           </a:p>
@@ -1350,7 +1193,7 @@
           <a:p>
             <a:fld id="{B4868AEC-A1E8-4E3F-8255-380A839494A5}" type="datetime1">
               <a:rPr lang="zh-Hans-HK" altLang="en-US" smtClean="0"/>
-              <a:t>8/8/2026</a:t>
+              <a:t>08/10/2026</a:t>
             </a:fld>
             <a:endParaRPr lang="zh-Hans-HK" altLang="en-US"/>
           </a:p>
@@ -1560,7 +1403,7 @@
           <a:p>
             <a:fld id="{EF920706-6DAE-4980-A181-69787124255D}" type="datetime1">
               <a:rPr lang="zh-Hans-HK" altLang="en-US" smtClean="0"/>
-              <a:t>8/8/2026</a:t>
+              <a:t>08/10/2026</a:t>
             </a:fld>
             <a:endParaRPr lang="zh-Hans-HK" altLang="en-US"/>
           </a:p>
@@ -1760,7 +1603,7 @@
           <a:p>
             <a:fld id="{1A175790-1734-4686-B703-974A777B5B4B}" type="datetime1">
               <a:rPr lang="zh-Hans-HK" altLang="en-US" smtClean="0"/>
-              <a:t>8/8/2026</a:t>
+              <a:t>08/10/2026</a:t>
             </a:fld>
             <a:endParaRPr lang="zh-Hans-HK" altLang="en-US"/>
           </a:p>
@@ -2036,7 +1879,7 @@
           <a:p>
             <a:fld id="{78164584-6F77-4795-AC9A-D3C407811108}" type="datetime1">
               <a:rPr lang="zh-Hans-HK" altLang="en-US" smtClean="0"/>
-              <a:t>8/8/2026</a:t>
+              <a:t>08/10/2026</a:t>
             </a:fld>
             <a:endParaRPr lang="zh-Hans-HK" altLang="en-US"/>
           </a:p>
@@ -2304,7 +2147,7 @@
           <a:p>
             <a:fld id="{33E1BABE-0F77-4582-AA5C-A6742AFE3AD0}" type="datetime1">
               <a:rPr lang="zh-Hans-HK" altLang="en-US" smtClean="0"/>
-              <a:t>8/8/2026</a:t>
+              <a:t>08/10/2026</a:t>
             </a:fld>
             <a:endParaRPr lang="zh-Hans-HK" altLang="en-US"/>
           </a:p>
@@ -2719,7 +2562,7 @@
           <a:p>
             <a:fld id="{2C9DDB1E-525B-4EDA-B549-6BA885D7A7DA}" type="datetime1">
               <a:rPr lang="zh-Hans-HK" altLang="en-US" smtClean="0"/>
-              <a:t>8/8/2026</a:t>
+              <a:t>08/10/2026</a:t>
             </a:fld>
             <a:endParaRPr lang="zh-Hans-HK" altLang="en-US"/>
           </a:p>
@@ -2861,7 +2704,7 @@
           <a:p>
             <a:fld id="{5030F264-FFF5-4DD8-8A35-3C9C460CD2D1}" type="datetime1">
               <a:rPr lang="zh-Hans-HK" altLang="en-US" smtClean="0"/>
-              <a:t>8/8/2026</a:t>
+              <a:t>08/10/2026</a:t>
             </a:fld>
             <a:endParaRPr lang="zh-Hans-HK" altLang="en-US"/>
           </a:p>
@@ -2974,7 +2817,7 @@
           <a:p>
             <a:fld id="{9AC71FCA-09CC-4F77-9714-5C465728D081}" type="datetime1">
               <a:rPr lang="zh-Hans-HK" altLang="en-US" smtClean="0"/>
-              <a:t>8/8/2026</a:t>
+              <a:t>08/10/2026</a:t>
             </a:fld>
             <a:endParaRPr lang="zh-Hans-HK" altLang="en-US"/>
           </a:p>
@@ -3287,7 +3130,7 @@
           <a:p>
             <a:fld id="{9184EE52-F9A1-4B1A-9E5B-D2A2C74977B1}" type="datetime1">
               <a:rPr lang="zh-Hans-HK" altLang="en-US" smtClean="0"/>
-              <a:t>8/8/2026</a:t>
+              <a:t>08/10/2026</a:t>
             </a:fld>
             <a:endParaRPr lang="zh-Hans-HK" altLang="en-US"/>
           </a:p>
@@ -3576,7 +3419,7 @@
           <a:p>
             <a:fld id="{E4E611EB-929D-49F6-82A1-CD07E35305B6}" type="datetime1">
               <a:rPr lang="zh-Hans-HK" altLang="en-US" smtClean="0"/>
-              <a:t>8/8/2026</a:t>
+              <a:t>08/10/2026</a:t>
             </a:fld>
             <a:endParaRPr lang="zh-Hans-HK" altLang="en-US"/>
           </a:p>
@@ -3819,7 +3662,7 @@
           <a:p>
             <a:fld id="{D32C4482-257B-415C-8401-EE424C28919F}" type="datetime1">
               <a:rPr lang="zh-Hans-HK" altLang="en-US" smtClean="0"/>
-              <a:t>8/8/2026</a:t>
+              <a:t>08/10/2026</a:t>
             </a:fld>
             <a:endParaRPr lang="zh-Hans-HK" altLang="en-US"/>
           </a:p>
@@ -5717,8 +5560,8 @@
           </a:p>
         </p:txBody>
       </p:sp>
-      <mc:AlternateContent xmlns:mc="http://schemas.openxmlformats.org/markup-compatibility/2006" xmlns:a14="http://schemas.microsoft.com/office/drawing/2010/main">
-        <mc:Choice Requires="a14">
+      <mc:AlternateContent xmlns:mc="http://schemas.openxmlformats.org/markup-compatibility/2006">
+        <mc:Choice xmlns:a14="http://schemas.microsoft.com/office/drawing/2010/main" Requires="a14">
           <p:sp>
             <p:nvSpPr>
               <p:cNvPr id="8" name="Content Placeholder 2">
@@ -6050,7 +5893,14 @@
                             <a:latin typeface="Cambria Math" panose="02040503050406030204" pitchFamily="18" charset="0"/>
                             <a:cs typeface="Times New Roman" panose="02020603050405020304" pitchFamily="18" charset="0"/>
                           </a:rPr>
-                          <m:t>𝑀𝑁</m:t>
+                          <m:t>𝑀</m:t>
+                        </m:r>
+                        <m:r>
+                          <a:rPr lang="en-HK" altLang="zh-Hans-HK" b="0" i="1" smtClean="0">
+                            <a:latin typeface="Cambria Math" panose="02040503050406030204" pitchFamily="18" charset="0"/>
+                            <a:cs typeface="Times New Roman" panose="02020603050405020304" pitchFamily="18" charset="0"/>
+                          </a:rPr>
+                          <m:t>𝑇</m:t>
                         </m:r>
                         <m:d>
                           <m:dPr>
@@ -6142,7 +5992,14 @@
                             <a:latin typeface="Cambria Math" panose="02040503050406030204" pitchFamily="18" charset="0"/>
                             <a:cs typeface="Times New Roman" panose="02020603050405020304" pitchFamily="18" charset="0"/>
                           </a:rPr>
-                          <m:t>𝑀𝑁</m:t>
+                          <m:t>𝑀</m:t>
+                        </m:r>
+                        <m:r>
+                          <a:rPr lang="en-HK" altLang="zh-Hans-HK" b="0" i="1" smtClean="0">
+                            <a:latin typeface="Cambria Math" panose="02040503050406030204" pitchFamily="18" charset="0"/>
+                            <a:cs typeface="Times New Roman" panose="02020603050405020304" pitchFamily="18" charset="0"/>
+                          </a:rPr>
+                          <m:t>𝑇</m:t>
                         </m:r>
                         <m:r>
                           <a:rPr lang="en-HK" altLang="zh-Hans-HK" b="0" i="1" smtClean="0">
@@ -6244,7 +6101,7 @@
             </p:txBody>
           </p:sp>
         </mc:Choice>
-        <mc:Fallback xmlns="">
+        <mc:Fallback>
           <p:sp>
             <p:nvSpPr>
               <p:cNvPr id="8" name="Content Placeholder 2">
@@ -6278,7 +6135,7 @@
               <a:lstStyle/>
               <a:p>
                 <a:r>
-                  <a:rPr lang="zh-Hans-HK" altLang="en-US">
+                  <a:rPr lang="zh-CN" altLang="en-US">
                     <a:noFill/>
                   </a:rPr>
                   <a:t> </a:t>
@@ -7067,8 +6924,8 @@
           </a:p>
         </p:txBody>
       </p:sp>
-      <mc:AlternateContent xmlns:mc="http://schemas.openxmlformats.org/markup-compatibility/2006">
-        <mc:Choice xmlns:a14="http://schemas.microsoft.com/office/drawing/2010/main" Requires="a14">
+      <mc:AlternateContent xmlns:mc="http://schemas.openxmlformats.org/markup-compatibility/2006" xmlns:a14="http://schemas.microsoft.com/office/drawing/2010/main">
+        <mc:Choice Requires="a14">
           <p:sp>
             <p:nvSpPr>
               <p:cNvPr id="3" name="Content Placeholder 2">
@@ -7330,7 +7187,7 @@
             </p:txBody>
           </p:sp>
         </mc:Choice>
-        <mc:Fallback>
+        <mc:Fallback xmlns="">
           <p:sp>
             <p:nvSpPr>
               <p:cNvPr id="3" name="Content Placeholder 2">

--- a/publication/EARTH_presentation.pptx
+++ b/publication/EARTH_presentation.pptx
@@ -134,7 +134,7 @@
 <file path=ppt/revisionInfo.xml><?xml version="1.0" encoding="utf-8"?>
 <p1510:revInfo xmlns:a="http://schemas.openxmlformats.org/drawingml/2006/main" xmlns:r="http://schemas.openxmlformats.org/officeDocument/2006/relationships" xmlns:p1510="http://schemas.microsoft.com/office/powerpoint/2015/10/main">
   <p1510:revLst>
-    <p1510:client id="{0729CCF5-1BFF-44A5-9BA5-7CE0202E4242}" v="2" dt="2026-08-10T13:43:57.899"/>
+    <p1510:client id="{0729CCF5-1BFF-44A5-9BA5-7CE0202E4242}" v="39" dt="2026-08-10T15:34:04.929"/>
   </p1510:revLst>
 </p1510:revInfo>
 </file>
@@ -144,18 +144,56 @@
   <pc:docChgLst>
     <pc:chgData name="Tsz Nam Chan" userId="d72bc0ce159372cc" providerId="LiveId" clId="{D0A54EB6-4CA2-42C5-ABC6-C64AAD2F7BCD}"/>
     <pc:docChg chg="modSld">
-      <pc:chgData name="Tsz Nam Chan" userId="d72bc0ce159372cc" providerId="LiveId" clId="{D0A54EB6-4CA2-42C5-ABC6-C64AAD2F7BCD}" dt="2026-08-10T13:43:57.899" v="1" actId="20577"/>
+      <pc:chgData name="Tsz Nam Chan" userId="d72bc0ce159372cc" providerId="LiveId" clId="{D0A54EB6-4CA2-42C5-ABC6-C64AAD2F7BCD}" dt="2026-08-10T15:34:04.929" v="38" actId="114"/>
       <pc:docMkLst>
         <pc:docMk/>
       </pc:docMkLst>
       <pc:sldChg chg="modSp">
-        <pc:chgData name="Tsz Nam Chan" userId="d72bc0ce159372cc" providerId="LiveId" clId="{D0A54EB6-4CA2-42C5-ABC6-C64AAD2F7BCD}" dt="2026-08-10T13:43:57.899" v="1" actId="20577"/>
+        <pc:chgData name="Tsz Nam Chan" userId="d72bc0ce159372cc" providerId="LiveId" clId="{D0A54EB6-4CA2-42C5-ABC6-C64AAD2F7BCD}" dt="2026-08-10T15:32:35.577" v="28" actId="114"/>
+        <pc:sldMkLst>
+          <pc:docMk/>
+          <pc:sldMk cId="3206141009" sldId="262"/>
+        </pc:sldMkLst>
+        <pc:spChg chg="mod">
+          <ac:chgData name="Tsz Nam Chan" userId="d72bc0ce159372cc" providerId="LiveId" clId="{D0A54EB6-4CA2-42C5-ABC6-C64AAD2F7BCD}" dt="2026-08-10T15:31:44.818" v="20" actId="114"/>
+          <ac:spMkLst>
+            <pc:docMk/>
+            <pc:sldMk cId="3206141009" sldId="262"/>
+            <ac:spMk id="3" creationId="{2A485A92-FE14-44EB-7F5C-A418B5BBB968}"/>
+          </ac:spMkLst>
+        </pc:spChg>
+        <pc:spChg chg="mod">
+          <ac:chgData name="Tsz Nam Chan" userId="d72bc0ce159372cc" providerId="LiveId" clId="{D0A54EB6-4CA2-42C5-ABC6-C64AAD2F7BCD}" dt="2026-08-10T15:32:35.577" v="28" actId="114"/>
+          <ac:spMkLst>
+            <pc:docMk/>
+            <pc:sldMk cId="3206141009" sldId="262"/>
+            <ac:spMk id="7" creationId="{23842B56-793E-F748-06A6-2128ED6DBCBF}"/>
+          </ac:spMkLst>
+        </pc:spChg>
+      </pc:sldChg>
+      <pc:sldChg chg="modSp">
+        <pc:chgData name="Tsz Nam Chan" userId="d72bc0ce159372cc" providerId="LiveId" clId="{D0A54EB6-4CA2-42C5-ABC6-C64AAD2F7BCD}" dt="2026-08-10T15:33:36.495" v="34" actId="114"/>
+        <pc:sldMkLst>
+          <pc:docMk/>
+          <pc:sldMk cId="3349179287" sldId="267"/>
+        </pc:sldMkLst>
+        <pc:spChg chg="mod">
+          <ac:chgData name="Tsz Nam Chan" userId="d72bc0ce159372cc" providerId="LiveId" clId="{D0A54EB6-4CA2-42C5-ABC6-C64AAD2F7BCD}" dt="2026-08-10T15:33:36.495" v="34" actId="114"/>
+          <ac:spMkLst>
+            <pc:docMk/>
+            <pc:sldMk cId="3349179287" sldId="267"/>
+            <ac:spMk id="3" creationId="{69304792-F9FA-57DA-961F-60CD299E5733}"/>
+          </ac:spMkLst>
+        </pc:spChg>
+      </pc:sldChg>
+      <pc:sldChg chg="modSp">
+        <pc:chgData name="Tsz Nam Chan" userId="d72bc0ce159372cc" providerId="LiveId" clId="{D0A54EB6-4CA2-42C5-ABC6-C64AAD2F7BCD}" dt="2026-08-10T15:34:04.929" v="38" actId="114"/>
         <pc:sldMkLst>
           <pc:docMk/>
           <pc:sldMk cId="1944472154" sldId="268"/>
         </pc:sldMkLst>
         <pc:spChg chg="mod">
-          <ac:chgData name="Tsz Nam Chan" userId="d72bc0ce159372cc" providerId="LiveId" clId="{D0A54EB6-4CA2-42C5-ABC6-C64AAD2F7BCD}" dt="2026-08-10T13:43:57.899" v="1" actId="20577"/>
+          <ac:chgData name="Tsz Nam Chan" userId="d72bc0ce159372cc" providerId="LiveId" clId="{D0A54EB6-4CA2-42C5-ABC6-C64AAD2F7BCD}" dt="2026-08-10T15:34:04.929" v="38" actId="114"/>
           <ac:spMkLst>
             <pc:docMk/>
             <pc:sldMk cId="1944472154" sldId="268"/>
@@ -576,7 +614,7 @@
           <a:p>
             <a:fld id="{DB27F06F-BA07-4A0F-A4F6-CE78195A93D7}" type="datetimeFigureOut">
               <a:rPr lang="zh-Hans-HK" altLang="en-US" smtClean="0"/>
-              <a:t>08/10/2026</a:t>
+              <a:t>08/11/2026</a:t>
             </a:fld>
             <a:endParaRPr lang="zh-Hans-HK" altLang="en-US"/>
           </a:p>
@@ -993,7 +1031,7 @@
           <a:p>
             <a:fld id="{A702C107-3D46-4C34-AD55-6B06F342152C}" type="datetime1">
               <a:rPr lang="zh-Hans-HK" altLang="en-US" smtClean="0"/>
-              <a:t>08/10/2026</a:t>
+              <a:t>08/11/2026</a:t>
             </a:fld>
             <a:endParaRPr lang="zh-Hans-HK" altLang="en-US"/>
           </a:p>
@@ -1193,7 +1231,7 @@
           <a:p>
             <a:fld id="{B4868AEC-A1E8-4E3F-8255-380A839494A5}" type="datetime1">
               <a:rPr lang="zh-Hans-HK" altLang="en-US" smtClean="0"/>
-              <a:t>08/10/2026</a:t>
+              <a:t>08/11/2026</a:t>
             </a:fld>
             <a:endParaRPr lang="zh-Hans-HK" altLang="en-US"/>
           </a:p>
@@ -1403,7 +1441,7 @@
           <a:p>
             <a:fld id="{EF920706-6DAE-4980-A181-69787124255D}" type="datetime1">
               <a:rPr lang="zh-Hans-HK" altLang="en-US" smtClean="0"/>
-              <a:t>08/10/2026</a:t>
+              <a:t>08/11/2026</a:t>
             </a:fld>
             <a:endParaRPr lang="zh-Hans-HK" altLang="en-US"/>
           </a:p>
@@ -1603,7 +1641,7 @@
           <a:p>
             <a:fld id="{1A175790-1734-4686-B703-974A777B5B4B}" type="datetime1">
               <a:rPr lang="zh-Hans-HK" altLang="en-US" smtClean="0"/>
-              <a:t>08/10/2026</a:t>
+              <a:t>08/11/2026</a:t>
             </a:fld>
             <a:endParaRPr lang="zh-Hans-HK" altLang="en-US"/>
           </a:p>
@@ -1879,7 +1917,7 @@
           <a:p>
             <a:fld id="{78164584-6F77-4795-AC9A-D3C407811108}" type="datetime1">
               <a:rPr lang="zh-Hans-HK" altLang="en-US" smtClean="0"/>
-              <a:t>08/10/2026</a:t>
+              <a:t>08/11/2026</a:t>
             </a:fld>
             <a:endParaRPr lang="zh-Hans-HK" altLang="en-US"/>
           </a:p>
@@ -2147,7 +2185,7 @@
           <a:p>
             <a:fld id="{33E1BABE-0F77-4582-AA5C-A6742AFE3AD0}" type="datetime1">
               <a:rPr lang="zh-Hans-HK" altLang="en-US" smtClean="0"/>
-              <a:t>08/10/2026</a:t>
+              <a:t>08/11/2026</a:t>
             </a:fld>
             <a:endParaRPr lang="zh-Hans-HK" altLang="en-US"/>
           </a:p>
@@ -2562,7 +2600,7 @@
           <a:p>
             <a:fld id="{2C9DDB1E-525B-4EDA-B549-6BA885D7A7DA}" type="datetime1">
               <a:rPr lang="zh-Hans-HK" altLang="en-US" smtClean="0"/>
-              <a:t>08/10/2026</a:t>
+              <a:t>08/11/2026</a:t>
             </a:fld>
             <a:endParaRPr lang="zh-Hans-HK" altLang="en-US"/>
           </a:p>
@@ -2704,7 +2742,7 @@
           <a:p>
             <a:fld id="{5030F264-FFF5-4DD8-8A35-3C9C460CD2D1}" type="datetime1">
               <a:rPr lang="zh-Hans-HK" altLang="en-US" smtClean="0"/>
-              <a:t>08/10/2026</a:t>
+              <a:t>08/11/2026</a:t>
             </a:fld>
             <a:endParaRPr lang="zh-Hans-HK" altLang="en-US"/>
           </a:p>
@@ -2817,7 +2855,7 @@
           <a:p>
             <a:fld id="{9AC71FCA-09CC-4F77-9714-5C465728D081}" type="datetime1">
               <a:rPr lang="zh-Hans-HK" altLang="en-US" smtClean="0"/>
-              <a:t>08/10/2026</a:t>
+              <a:t>08/11/2026</a:t>
             </a:fld>
             <a:endParaRPr lang="zh-Hans-HK" altLang="en-US"/>
           </a:p>
@@ -3130,7 +3168,7 @@
           <a:p>
             <a:fld id="{9184EE52-F9A1-4B1A-9E5B-D2A2C74977B1}" type="datetime1">
               <a:rPr lang="zh-Hans-HK" altLang="en-US" smtClean="0"/>
-              <a:t>08/10/2026</a:t>
+              <a:t>08/11/2026</a:t>
             </a:fld>
             <a:endParaRPr lang="zh-Hans-HK" altLang="en-US"/>
           </a:p>
@@ -3419,7 +3457,7 @@
           <a:p>
             <a:fld id="{E4E611EB-929D-49F6-82A1-CD07E35305B6}" type="datetime1">
               <a:rPr lang="zh-Hans-HK" altLang="en-US" smtClean="0"/>
-              <a:t>08/10/2026</a:t>
+              <a:t>08/11/2026</a:t>
             </a:fld>
             <a:endParaRPr lang="zh-Hans-HK" altLang="en-US"/>
           </a:p>
@@ -3662,7 +3700,7 @@
           <a:p>
             <a:fld id="{D32C4482-257B-415C-8401-EE424C28919F}" type="datetime1">
               <a:rPr lang="zh-Hans-HK" altLang="en-US" smtClean="0"/>
-              <a:t>08/10/2026</a:t>
+              <a:t>08/11/2026</a:t>
             </a:fld>
             <a:endParaRPr lang="zh-Hans-HK" altLang="en-US"/>
           </a:p>
@@ -4917,8 +4955,8 @@
           </a:p>
         </p:txBody>
       </p:sp>
-      <mc:AlternateContent xmlns:mc="http://schemas.openxmlformats.org/markup-compatibility/2006" xmlns:a14="http://schemas.microsoft.com/office/drawing/2010/main">
-        <mc:Choice Requires="a14">
+      <mc:AlternateContent xmlns:mc="http://schemas.openxmlformats.org/markup-compatibility/2006">
+        <mc:Choice xmlns:a14="http://schemas.microsoft.com/office/drawing/2010/main" Requires="a14">
           <p:sp>
             <p:nvSpPr>
               <p:cNvPr id="3" name="Content Placeholder 2">
@@ -4959,7 +4997,7 @@
                     <m:sSub>
                       <m:sSubPr>
                         <m:ctrlPr>
-                          <a:rPr lang="en-HK" altLang="zh-Hans-HK" b="1">
+                          <a:rPr lang="en-HK" altLang="zh-Hans-HK" b="0" i="1">
                             <a:latin typeface="Cambria Math" panose="02040503050406030204" pitchFamily="18" charset="0"/>
                             <a:cs typeface="Times New Roman" panose="02020603050405020304" pitchFamily="18" charset="0"/>
                           </a:rPr>
@@ -4967,16 +5005,16 @@
                       </m:sSubPr>
                       <m:e>
                         <m:r>
-                          <a:rPr lang="en-HK" altLang="zh-Hans-HK" b="1">
+                          <a:rPr lang="en-HK" altLang="zh-Hans-HK" b="0" i="1">
                             <a:latin typeface="Cambria Math" panose="02040503050406030204" pitchFamily="18" charset="0"/>
                             <a:cs typeface="Times New Roman" panose="02020603050405020304" pitchFamily="18" charset="0"/>
                           </a:rPr>
-                          <m:t>𝐩</m:t>
+                          <m:t>𝑝</m:t>
                         </m:r>
                       </m:e>
                       <m:sub>
                         <m:r>
-                          <a:rPr lang="en-HK" altLang="zh-Hans-HK" i="1">
+                          <a:rPr lang="en-HK" altLang="zh-Hans-HK" b="0" i="1">
                             <a:latin typeface="Cambria Math" panose="02040503050406030204" pitchFamily="18" charset="0"/>
                             <a:cs typeface="Times New Roman" panose="02020603050405020304" pitchFamily="18" charset="0"/>
                           </a:rPr>
@@ -4985,7 +5023,7 @@
                       </m:sub>
                     </m:sSub>
                     <m:r>
-                      <a:rPr lang="en-HK" altLang="zh-Hans-HK" i="1">
+                      <a:rPr lang="en-HK" altLang="zh-Hans-HK" b="0" i="1">
                         <a:latin typeface="Cambria Math" panose="02040503050406030204" pitchFamily="18" charset="0"/>
                         <a:cs typeface="Times New Roman" panose="02020603050405020304" pitchFamily="18" charset="0"/>
                       </a:rPr>
@@ -4994,7 +5032,7 @@
                     <m:sSub>
                       <m:sSubPr>
                         <m:ctrlPr>
-                          <a:rPr lang="en-HK" altLang="zh-Hans-HK" i="1">
+                          <a:rPr lang="en-HK" altLang="zh-Hans-HK" b="0" i="1">
                             <a:latin typeface="Cambria Math" panose="02040503050406030204" pitchFamily="18" charset="0"/>
                             <a:cs typeface="Times New Roman" panose="02020603050405020304" pitchFamily="18" charset="0"/>
                           </a:rPr>
@@ -5002,7 +5040,7 @@
                       </m:sSubPr>
                       <m:e>
                         <m:r>
-                          <a:rPr lang="en-HK" altLang="zh-Hans-HK" i="1">
+                          <a:rPr lang="en-HK" altLang="zh-Hans-HK" b="0" i="1">
                             <a:latin typeface="Cambria Math" panose="02040503050406030204" pitchFamily="18" charset="0"/>
                             <a:cs typeface="Times New Roman" panose="02020603050405020304" pitchFamily="18" charset="0"/>
                           </a:rPr>
@@ -5013,7 +5051,7 @@
                         <m:sSub>
                           <m:sSubPr>
                             <m:ctrlPr>
-                              <a:rPr lang="en-HK" altLang="zh-Hans-HK" b="1">
+                              <a:rPr lang="en-HK" altLang="zh-Hans-HK" b="0" i="1">
                                 <a:latin typeface="Cambria Math" panose="02040503050406030204" pitchFamily="18" charset="0"/>
                                 <a:cs typeface="Times New Roman" panose="02020603050405020304" pitchFamily="18" charset="0"/>
                               </a:rPr>
@@ -5021,16 +5059,16 @@
                           </m:sSubPr>
                           <m:e>
                             <m:r>
-                              <a:rPr lang="en-HK" altLang="zh-Hans-HK" b="1">
+                              <a:rPr lang="en-HK" altLang="zh-Hans-HK" b="0" i="1">
                                 <a:latin typeface="Cambria Math" panose="02040503050406030204" pitchFamily="18" charset="0"/>
                                 <a:cs typeface="Times New Roman" panose="02020603050405020304" pitchFamily="18" charset="0"/>
                               </a:rPr>
-                              <m:t>𝐩</m:t>
+                              <m:t>𝑝</m:t>
                             </m:r>
                           </m:e>
                           <m:sub>
                             <m:r>
-                              <a:rPr lang="en-HK" altLang="zh-Hans-HK" i="1">
+                              <a:rPr lang="en-HK" altLang="zh-Hans-HK" b="0" i="1">
                                 <a:latin typeface="Cambria Math" panose="02040503050406030204" pitchFamily="18" charset="0"/>
                                 <a:cs typeface="Times New Roman" panose="02020603050405020304" pitchFamily="18" charset="0"/>
                               </a:rPr>
@@ -5069,7 +5107,7 @@
                     <m:sSub>
                       <m:sSubPr>
                         <m:ctrlPr>
-                          <a:rPr lang="en-HK" altLang="zh-Hans-HK" b="1" i="0" smtClean="0">
+                          <a:rPr lang="en-HK" altLang="zh-Hans-HK" b="0" i="1" smtClean="0">
                             <a:latin typeface="Cambria Math" panose="02040503050406030204" pitchFamily="18" charset="0"/>
                             <a:cs typeface="Times New Roman" panose="02020603050405020304" pitchFamily="18" charset="0"/>
                           </a:rPr>
@@ -5077,11 +5115,11 @@
                       </m:sSubPr>
                       <m:e>
                         <m:r>
-                          <a:rPr lang="en-HK" altLang="zh-Hans-HK" b="1" i="0" smtClean="0">
+                          <a:rPr lang="en-HK" altLang="zh-Hans-HK" b="0" i="1" smtClean="0">
                             <a:latin typeface="Cambria Math" panose="02040503050406030204" pitchFamily="18" charset="0"/>
                             <a:cs typeface="Times New Roman" panose="02020603050405020304" pitchFamily="18" charset="0"/>
                           </a:rPr>
-                          <m:t>𝐩</m:t>
+                          <m:t>𝑝</m:t>
                         </m:r>
                       </m:e>
                       <m:sub>
@@ -5123,7 +5161,7 @@
                         <m:sSub>
                           <m:sSubPr>
                             <m:ctrlPr>
-                              <a:rPr lang="en-HK" altLang="zh-Hans-HK" b="1" i="0" smtClean="0">
+                              <a:rPr lang="en-HK" altLang="zh-Hans-HK" b="0" i="1" smtClean="0">
                                 <a:latin typeface="Cambria Math" panose="02040503050406030204" pitchFamily="18" charset="0"/>
                                 <a:cs typeface="Times New Roman" panose="02020603050405020304" pitchFamily="18" charset="0"/>
                               </a:rPr>
@@ -5131,11 +5169,11 @@
                           </m:sSubPr>
                           <m:e>
                             <m:r>
-                              <a:rPr lang="en-HK" altLang="zh-Hans-HK" b="1" i="0" smtClean="0">
+                              <a:rPr lang="en-HK" altLang="zh-Hans-HK" b="0" i="1" smtClean="0">
                                 <a:latin typeface="Cambria Math" panose="02040503050406030204" pitchFamily="18" charset="0"/>
                                 <a:cs typeface="Times New Roman" panose="02020603050405020304" pitchFamily="18" charset="0"/>
                               </a:rPr>
-                              <m:t>𝐩</m:t>
+                              <m:t>𝑝</m:t>
                             </m:r>
                           </m:e>
                           <m:sub>
@@ -5386,7 +5424,7 @@
             </p:txBody>
           </p:sp>
         </mc:Choice>
-        <mc:Fallback xmlns="">
+        <mc:Fallback>
           <p:sp>
             <p:nvSpPr>
               <p:cNvPr id="3" name="Content Placeholder 2">
@@ -5420,7 +5458,7 @@
               <a:lstStyle/>
               <a:p>
                 <a:r>
-                  <a:rPr lang="zh-Hans-HK" altLang="en-US">
+                  <a:rPr lang="zh-CN" altLang="en-US">
                     <a:noFill/>
                   </a:rPr>
                   <a:t> </a:t>
@@ -5645,7 +5683,7 @@
                     <m:sSub>
                       <m:sSubPr>
                         <m:ctrlPr>
-                          <a:rPr lang="en-HK" altLang="zh-Hans-HK" b="1" i="0" smtClean="0">
+                          <a:rPr lang="en-HK" altLang="zh-Hans-HK" b="0" i="1" smtClean="0">
                             <a:latin typeface="Cambria Math" panose="02040503050406030204" pitchFamily="18" charset="0"/>
                             <a:cs typeface="Times New Roman" panose="02020603050405020304" pitchFamily="18" charset="0"/>
                           </a:rPr>
@@ -5653,11 +5691,11 @@
                       </m:sSubPr>
                       <m:e>
                         <m:r>
-                          <a:rPr lang="en-HK" altLang="zh-Hans-HK" b="1" i="0" smtClean="0">
+                          <a:rPr lang="en-HK" altLang="zh-Hans-HK" b="0" i="1" smtClean="0">
                             <a:latin typeface="Cambria Math" panose="02040503050406030204" pitchFamily="18" charset="0"/>
                             <a:cs typeface="Times New Roman" panose="02020603050405020304" pitchFamily="18" charset="0"/>
                           </a:rPr>
-                          <m:t>𝐩</m:t>
+                          <m:t>𝑝</m:t>
                         </m:r>
                       </m:e>
                       <m:sub>
@@ -5699,7 +5737,7 @@
                         <m:sSub>
                           <m:sSubPr>
                             <m:ctrlPr>
-                              <a:rPr lang="en-HK" altLang="zh-Hans-HK" b="1" i="0" smtClean="0">
+                              <a:rPr lang="en-HK" altLang="zh-Hans-HK" b="0" i="1" smtClean="0">
                                 <a:latin typeface="Cambria Math" panose="02040503050406030204" pitchFamily="18" charset="0"/>
                                 <a:cs typeface="Times New Roman" panose="02020603050405020304" pitchFamily="18" charset="0"/>
                               </a:rPr>
@@ -5707,11 +5745,11 @@
                           </m:sSubPr>
                           <m:e>
                             <m:r>
-                              <a:rPr lang="en-HK" altLang="zh-Hans-HK" b="1" i="0" smtClean="0">
+                              <a:rPr lang="en-HK" altLang="zh-Hans-HK" b="0" i="1" smtClean="0">
                                 <a:latin typeface="Cambria Math" panose="02040503050406030204" pitchFamily="18" charset="0"/>
                                 <a:cs typeface="Times New Roman" panose="02020603050405020304" pitchFamily="18" charset="0"/>
                               </a:rPr>
-                              <m:t>𝐩</m:t>
+                              <m:t>𝑝</m:t>
                             </m:r>
                           </m:e>
                           <m:sub>
@@ -5769,7 +5807,7 @@
                     <m:sSub>
                       <m:sSubPr>
                         <m:ctrlPr>
-                          <a:rPr lang="en-HK" altLang="zh-Hans-HK" b="1" i="0" smtClean="0">
+                          <a:rPr lang="en-HK" altLang="zh-Hans-HK" b="0" i="1" smtClean="0">
                             <a:latin typeface="Cambria Math" panose="02040503050406030204" pitchFamily="18" charset="0"/>
                             <a:cs typeface="Times New Roman" panose="02020603050405020304" pitchFamily="18" charset="0"/>
                           </a:rPr>
@@ -5777,11 +5815,11 @@
                       </m:sSubPr>
                       <m:e>
                         <m:r>
-                          <a:rPr lang="en-HK" altLang="zh-Hans-HK" b="1" i="0" smtClean="0">
+                          <a:rPr lang="en-HK" altLang="zh-Hans-HK" b="0" i="1" smtClean="0">
                             <a:latin typeface="Cambria Math" panose="02040503050406030204" pitchFamily="18" charset="0"/>
                             <a:cs typeface="Times New Roman" panose="02020603050405020304" pitchFamily="18" charset="0"/>
                           </a:rPr>
-                          <m:t>𝐩</m:t>
+                          <m:t>𝑝</m:t>
                         </m:r>
                       </m:e>
                       <m:sub>
@@ -5823,7 +5861,7 @@
                         <m:sSub>
                           <m:sSubPr>
                             <m:ctrlPr>
-                              <a:rPr lang="en-HK" altLang="zh-Hans-HK" b="1" i="0" smtClean="0">
+                              <a:rPr lang="en-HK" altLang="zh-Hans-HK" b="0" i="1" smtClean="0">
                                 <a:latin typeface="Cambria Math" panose="02040503050406030204" pitchFamily="18" charset="0"/>
                                 <a:cs typeface="Times New Roman" panose="02020603050405020304" pitchFamily="18" charset="0"/>
                               </a:rPr>
@@ -5831,11 +5869,11 @@
                           </m:sSubPr>
                           <m:e>
                             <m:r>
-                              <a:rPr lang="en-HK" altLang="zh-Hans-HK" b="1" i="0" smtClean="0">
+                              <a:rPr lang="en-HK" altLang="zh-Hans-HK" b="0" i="1" smtClean="0">
                                 <a:latin typeface="Cambria Math" panose="02040503050406030204" pitchFamily="18" charset="0"/>
                                 <a:cs typeface="Times New Roman" panose="02020603050405020304" pitchFamily="18" charset="0"/>
                               </a:rPr>
-                              <m:t>𝐩</m:t>
+                              <m:t>𝑝</m:t>
                             </m:r>
                           </m:e>
                           <m:sub>
@@ -5893,14 +5931,7 @@
                             <a:latin typeface="Cambria Math" panose="02040503050406030204" pitchFamily="18" charset="0"/>
                             <a:cs typeface="Times New Roman" panose="02020603050405020304" pitchFamily="18" charset="0"/>
                           </a:rPr>
-                          <m:t>𝑀</m:t>
-                        </m:r>
-                        <m:r>
-                          <a:rPr lang="en-HK" altLang="zh-Hans-HK" b="0" i="1" smtClean="0">
-                            <a:latin typeface="Cambria Math" panose="02040503050406030204" pitchFamily="18" charset="0"/>
-                            <a:cs typeface="Times New Roman" panose="02020603050405020304" pitchFamily="18" charset="0"/>
-                          </a:rPr>
-                          <m:t>𝑇</m:t>
+                          <m:t>𝑀𝑇</m:t>
                         </m:r>
                         <m:d>
                           <m:dPr>
@@ -5992,14 +6023,7 @@
                             <a:latin typeface="Cambria Math" panose="02040503050406030204" pitchFamily="18" charset="0"/>
                             <a:cs typeface="Times New Roman" panose="02020603050405020304" pitchFamily="18" charset="0"/>
                           </a:rPr>
-                          <m:t>𝑀</m:t>
-                        </m:r>
-                        <m:r>
-                          <a:rPr lang="en-HK" altLang="zh-Hans-HK" b="0" i="1" smtClean="0">
-                            <a:latin typeface="Cambria Math" panose="02040503050406030204" pitchFamily="18" charset="0"/>
-                            <a:cs typeface="Times New Roman" panose="02020603050405020304" pitchFamily="18" charset="0"/>
-                          </a:rPr>
-                          <m:t>𝑇</m:t>
+                          <m:t>𝑀𝑇</m:t>
                         </m:r>
                         <m:r>
                           <a:rPr lang="en-HK" altLang="zh-Hans-HK" b="0" i="1" smtClean="0">
@@ -8788,8 +8812,8 @@
           </a:p>
         </p:txBody>
       </p:sp>
-      <mc:AlternateContent xmlns:mc="http://schemas.openxmlformats.org/markup-compatibility/2006" xmlns:a14="http://schemas.microsoft.com/office/drawing/2010/main">
-        <mc:Choice Requires="a14">
+      <mc:AlternateContent xmlns:mc="http://schemas.openxmlformats.org/markup-compatibility/2006">
+        <mc:Choice xmlns:a14="http://schemas.microsoft.com/office/drawing/2010/main" Requires="a14">
           <p:sp>
             <p:nvSpPr>
               <p:cNvPr id="3" name="Content Placeholder 2">
@@ -8897,7 +8921,7 @@
                         <m:begChr m:val="{"/>
                         <m:endChr m:val="}"/>
                         <m:ctrlPr>
-                          <a:rPr lang="en-HK" altLang="zh-Hans-HK" b="1" i="1" smtClean="0">
+                          <a:rPr lang="en-HK" altLang="zh-Hans-HK" i="1" smtClean="0">
                             <a:latin typeface="Cambria Math" panose="02040503050406030204" pitchFamily="18" charset="0"/>
                             <a:cs typeface="Times New Roman" panose="02020603050405020304" pitchFamily="18" charset="0"/>
                           </a:rPr>
@@ -8907,7 +8931,7 @@
                         <m:d>
                           <m:dPr>
                             <m:ctrlPr>
-                              <a:rPr lang="en-HK" altLang="zh-Hans-HK" b="1" i="1" smtClean="0">
+                              <a:rPr lang="en-HK" altLang="zh-Hans-HK" i="1" smtClean="0">
                                 <a:latin typeface="Cambria Math" panose="02040503050406030204" pitchFamily="18" charset="0"/>
                                 <a:cs typeface="Times New Roman" panose="02020603050405020304" pitchFamily="18" charset="0"/>
                               </a:rPr>
@@ -8917,7 +8941,7 @@
                             <m:sSub>
                               <m:sSubPr>
                                 <m:ctrlPr>
-                                  <a:rPr lang="en-HK" altLang="zh-Hans-HK" b="1" i="0" smtClean="0">
+                                  <a:rPr lang="en-HK" altLang="zh-Hans-HK" b="0" i="1" smtClean="0">
                                     <a:latin typeface="Cambria Math" panose="02040503050406030204" pitchFamily="18" charset="0"/>
                                     <a:cs typeface="Times New Roman" panose="02020603050405020304" pitchFamily="18" charset="0"/>
                                   </a:rPr>
@@ -8925,11 +8949,11 @@
                               </m:sSubPr>
                               <m:e>
                                 <m:r>
-                                  <a:rPr lang="en-HK" altLang="zh-Hans-HK" b="1" i="0" smtClean="0">
+                                  <a:rPr lang="en-HK" altLang="zh-Hans-HK" b="0" i="1" smtClean="0">
                                     <a:latin typeface="Cambria Math" panose="02040503050406030204" pitchFamily="18" charset="0"/>
                                     <a:cs typeface="Times New Roman" panose="02020603050405020304" pitchFamily="18" charset="0"/>
                                   </a:rPr>
-                                  <m:t>𝐩</m:t>
+                                  <m:t>𝑝</m:t>
                                 </m:r>
                               </m:e>
                               <m:sub>
@@ -8971,7 +8995,7 @@
                                 <m:sSub>
                                   <m:sSubPr>
                                     <m:ctrlPr>
-                                      <a:rPr lang="en-HK" altLang="zh-Hans-HK" b="1" i="0" smtClean="0">
+                                      <a:rPr lang="en-HK" altLang="zh-Hans-HK" b="0" i="1" smtClean="0">
                                         <a:latin typeface="Cambria Math" panose="02040503050406030204" pitchFamily="18" charset="0"/>
                                         <a:cs typeface="Times New Roman" panose="02020603050405020304" pitchFamily="18" charset="0"/>
                                       </a:rPr>
@@ -8979,11 +9003,11 @@
                                   </m:sSubPr>
                                   <m:e>
                                     <m:r>
-                                      <a:rPr lang="en-HK" altLang="zh-Hans-HK" b="1" i="0" smtClean="0">
+                                      <a:rPr lang="en-HK" altLang="zh-Hans-HK" b="0" i="1" smtClean="0">
                                         <a:latin typeface="Cambria Math" panose="02040503050406030204" pitchFamily="18" charset="0"/>
                                         <a:cs typeface="Times New Roman" panose="02020603050405020304" pitchFamily="18" charset="0"/>
                                       </a:rPr>
-                                      <m:t>𝐩</m:t>
+                                      <m:t>𝑝</m:t>
                                     </m:r>
                                   </m:e>
                                   <m:sub>
@@ -9010,7 +9034,7 @@
                         <m:d>
                           <m:dPr>
                             <m:ctrlPr>
-                              <a:rPr lang="en-HK" altLang="zh-Hans-HK" b="1" i="1" smtClean="0">
+                              <a:rPr lang="en-HK" altLang="zh-Hans-HK" i="1" smtClean="0">
                                 <a:latin typeface="Cambria Math" panose="02040503050406030204" pitchFamily="18" charset="0"/>
                                 <a:cs typeface="Times New Roman" panose="02020603050405020304" pitchFamily="18" charset="0"/>
                               </a:rPr>
@@ -9020,7 +9044,7 @@
                             <m:sSub>
                               <m:sSubPr>
                                 <m:ctrlPr>
-                                  <a:rPr lang="en-HK" altLang="zh-Hans-HK" b="1" i="0" smtClean="0">
+                                  <a:rPr lang="en-HK" altLang="zh-Hans-HK" b="0" i="1" smtClean="0">
                                     <a:latin typeface="Cambria Math" panose="02040503050406030204" pitchFamily="18" charset="0"/>
                                     <a:cs typeface="Times New Roman" panose="02020603050405020304" pitchFamily="18" charset="0"/>
                                   </a:rPr>
@@ -9028,11 +9052,11 @@
                               </m:sSubPr>
                               <m:e>
                                 <m:r>
-                                  <a:rPr lang="en-HK" altLang="zh-Hans-HK" b="1" i="0" smtClean="0">
+                                  <a:rPr lang="en-HK" altLang="zh-Hans-HK" b="0" i="1" smtClean="0">
                                     <a:latin typeface="Cambria Math" panose="02040503050406030204" pitchFamily="18" charset="0"/>
                                     <a:cs typeface="Times New Roman" panose="02020603050405020304" pitchFamily="18" charset="0"/>
                                   </a:rPr>
-                                  <m:t>𝐩</m:t>
+                                  <m:t>𝑝</m:t>
                                 </m:r>
                               </m:e>
                               <m:sub>
@@ -9074,7 +9098,7 @@
                                 <m:sSub>
                                   <m:sSubPr>
                                     <m:ctrlPr>
-                                      <a:rPr lang="en-HK" altLang="zh-Hans-HK" b="1" i="0" smtClean="0">
+                                      <a:rPr lang="en-HK" altLang="zh-Hans-HK" b="0" i="1" smtClean="0">
                                         <a:latin typeface="Cambria Math" panose="02040503050406030204" pitchFamily="18" charset="0"/>
                                         <a:cs typeface="Times New Roman" panose="02020603050405020304" pitchFamily="18" charset="0"/>
                                       </a:rPr>
@@ -9082,11 +9106,11 @@
                                   </m:sSubPr>
                                   <m:e>
                                     <m:r>
-                                      <a:rPr lang="en-HK" altLang="zh-Hans-HK" b="1" i="0" smtClean="0">
+                                      <a:rPr lang="en-HK" altLang="zh-Hans-HK" b="0" i="1" smtClean="0">
                                         <a:latin typeface="Cambria Math" panose="02040503050406030204" pitchFamily="18" charset="0"/>
                                         <a:cs typeface="Times New Roman" panose="02020603050405020304" pitchFamily="18" charset="0"/>
                                       </a:rPr>
-                                      <m:t>𝐩</m:t>
+                                      <m:t>𝑝</m:t>
                                     </m:r>
                                   </m:e>
                                   <m:sub>
@@ -9113,7 +9137,7 @@
                         <m:d>
                           <m:dPr>
                             <m:ctrlPr>
-                              <a:rPr lang="en-HK" altLang="zh-Hans-HK" b="1" i="1" smtClean="0">
+                              <a:rPr lang="en-HK" altLang="zh-Hans-HK" i="1" smtClean="0">
                                 <a:latin typeface="Cambria Math" panose="02040503050406030204" pitchFamily="18" charset="0"/>
                                 <a:cs typeface="Times New Roman" panose="02020603050405020304" pitchFamily="18" charset="0"/>
                               </a:rPr>
@@ -9123,7 +9147,7 @@
                             <m:sSub>
                               <m:sSubPr>
                                 <m:ctrlPr>
-                                  <a:rPr lang="en-HK" altLang="zh-Hans-HK" b="1" i="0" smtClean="0">
+                                  <a:rPr lang="en-HK" altLang="zh-Hans-HK" b="0" i="1" smtClean="0">
                                     <a:latin typeface="Cambria Math" panose="02040503050406030204" pitchFamily="18" charset="0"/>
                                     <a:cs typeface="Times New Roman" panose="02020603050405020304" pitchFamily="18" charset="0"/>
                                   </a:rPr>
@@ -9131,11 +9155,11 @@
                               </m:sSubPr>
                               <m:e>
                                 <m:r>
-                                  <a:rPr lang="en-HK" altLang="zh-Hans-HK" b="1" i="0" smtClean="0">
+                                  <a:rPr lang="en-HK" altLang="zh-Hans-HK" b="0" i="1" smtClean="0">
                                     <a:latin typeface="Cambria Math" panose="02040503050406030204" pitchFamily="18" charset="0"/>
                                     <a:cs typeface="Times New Roman" panose="02020603050405020304" pitchFamily="18" charset="0"/>
                                   </a:rPr>
-                                  <m:t>𝐩</m:t>
+                                  <m:t>𝑝</m:t>
                                 </m:r>
                               </m:e>
                               <m:sub>
@@ -9177,7 +9201,7 @@
                                 <m:sSub>
                                   <m:sSubPr>
                                     <m:ctrlPr>
-                                      <a:rPr lang="en-HK" altLang="zh-Hans-HK" b="1" i="0" smtClean="0">
+                                      <a:rPr lang="en-HK" altLang="zh-Hans-HK" b="0" i="1" smtClean="0">
                                         <a:latin typeface="Cambria Math" panose="02040503050406030204" pitchFamily="18" charset="0"/>
                                         <a:cs typeface="Times New Roman" panose="02020603050405020304" pitchFamily="18" charset="0"/>
                                       </a:rPr>
@@ -9185,11 +9209,11 @@
                                   </m:sSubPr>
                                   <m:e>
                                     <m:r>
-                                      <a:rPr lang="en-HK" altLang="zh-Hans-HK" b="1" i="0" smtClean="0">
+                                      <a:rPr lang="en-HK" altLang="zh-Hans-HK" b="0" i="1" smtClean="0">
                                         <a:latin typeface="Cambria Math" panose="02040503050406030204" pitchFamily="18" charset="0"/>
                                         <a:cs typeface="Times New Roman" panose="02020603050405020304" pitchFamily="18" charset="0"/>
                                       </a:rPr>
-                                      <m:t>𝐩</m:t>
+                                      <m:t>𝑝</m:t>
                                     </m:r>
                                   </m:e>
                                   <m:sub>
@@ -9335,7 +9359,7 @@
             </p:txBody>
           </p:sp>
         </mc:Choice>
-        <mc:Fallback xmlns="">
+        <mc:Fallback>
           <p:sp>
             <p:nvSpPr>
               <p:cNvPr id="3" name="Content Placeholder 2">
@@ -9369,7 +9393,7 @@
               <a:lstStyle/>
               <a:p>
                 <a:r>
-                  <a:rPr lang="zh-Hans-HK" altLang="en-US">
+                  <a:rPr lang="zh-CN" altLang="en-US">
                     <a:noFill/>
                   </a:rPr>
                   <a:t> </a:t>
@@ -9409,8 +9433,8 @@
           </a:prstGeom>
         </p:spPr>
       </p:pic>
-      <mc:AlternateContent xmlns:mc="http://schemas.openxmlformats.org/markup-compatibility/2006" xmlns:a14="http://schemas.microsoft.com/office/drawing/2010/main">
-        <mc:Choice Requires="a14">
+      <mc:AlternateContent xmlns:mc="http://schemas.openxmlformats.org/markup-compatibility/2006">
+        <mc:Choice xmlns:a14="http://schemas.microsoft.com/office/drawing/2010/main" Requires="a14">
           <p:sp>
             <p:nvSpPr>
               <p:cNvPr id="7" name="TextBox 6">
@@ -9536,7 +9560,7 @@
                           <m:sSub>
                             <m:sSubPr>
                               <m:ctrlPr>
-                                <a:rPr lang="en-HK" altLang="zh-Hans-HK" sz="2200" b="1" i="0" smtClean="0">
+                                <a:rPr lang="en-HK" altLang="zh-Hans-HK" sz="2200" b="0" i="1" smtClean="0">
                                   <a:latin typeface="Cambria Math" panose="02040503050406030204" pitchFamily="18" charset="0"/>
                                   <a:cs typeface="Times New Roman" panose="02020603050405020304" pitchFamily="18" charset="0"/>
                                 </a:rPr>
@@ -9544,11 +9568,11 @@
                             </m:sSubPr>
                             <m:e>
                               <m:r>
-                                <a:rPr lang="en-HK" altLang="zh-Hans-HK" sz="2200" b="1" i="0" smtClean="0">
+                                <a:rPr lang="en-HK" altLang="zh-Hans-HK" sz="2200" b="0" i="1" smtClean="0">
                                   <a:latin typeface="Cambria Math" panose="02040503050406030204" pitchFamily="18" charset="0"/>
                                   <a:cs typeface="Times New Roman" panose="02020603050405020304" pitchFamily="18" charset="0"/>
                                 </a:rPr>
-                                <m:t>𝐩</m:t>
+                                <m:t>𝑝</m:t>
                               </m:r>
                             </m:e>
                             <m:sub>
@@ -9596,7 +9620,7 @@
                               <m:sSub>
                                 <m:sSubPr>
                                   <m:ctrlPr>
-                                    <a:rPr lang="en-HK" altLang="zh-Hans-HK" sz="2200" b="1" i="0" smtClean="0">
+                                    <a:rPr lang="en-HK" altLang="zh-Hans-HK" sz="2200" b="0" i="1" smtClean="0">
                                       <a:latin typeface="Cambria Math" panose="02040503050406030204" pitchFamily="18" charset="0"/>
                                       <a:cs typeface="Times New Roman" panose="02020603050405020304" pitchFamily="18" charset="0"/>
                                     </a:rPr>
@@ -9604,11 +9628,11 @@
                                 </m:sSubPr>
                                 <m:e>
                                   <m:r>
-                                    <a:rPr lang="en-HK" altLang="zh-Hans-HK" sz="2200" b="1" i="0" smtClean="0">
+                                    <a:rPr lang="en-HK" altLang="zh-Hans-HK" sz="2200" b="0" i="1" smtClean="0">
                                       <a:latin typeface="Cambria Math" panose="02040503050406030204" pitchFamily="18" charset="0"/>
                                       <a:cs typeface="Times New Roman" panose="02020603050405020304" pitchFamily="18" charset="0"/>
                                     </a:rPr>
-                                    <m:t>𝐩</m:t>
+                                    <m:t>𝑝</m:t>
                                   </m:r>
                                 </m:e>
                                 <m:sub>
@@ -9663,7 +9687,7 @@
                               <m:chr m:val="∑"/>
                               <m:supHide m:val="on"/>
                               <m:ctrlPr>
-                                <a:rPr lang="en-HK" altLang="zh-Hans-HK" sz="2200" b="0" i="1" smtClean="0">
+                                <a:rPr lang="en-HK" altLang="zh-Hans-HK" sz="2200" i="1" smtClean="0">
                                   <a:latin typeface="Cambria Math" panose="02040503050406030204" pitchFamily="18" charset="0"/>
                                   <a:cs typeface="Times New Roman" panose="02020603050405020304" pitchFamily="18" charset="0"/>
                                 </a:rPr>
@@ -9673,7 +9697,7 @@
                               <m:eqArr>
                                 <m:eqArrPr>
                                   <m:ctrlPr>
-                                    <a:rPr lang="en-HK" altLang="zh-Hans-HK" sz="2200" b="0" i="1" smtClean="0">
+                                    <a:rPr lang="en-HK" altLang="zh-Hans-HK" sz="2200" i="1" smtClean="0">
                                       <a:latin typeface="Cambria Math" panose="02040503050406030204" pitchFamily="18" charset="0"/>
                                       <a:cs typeface="Times New Roman" panose="02020603050405020304" pitchFamily="18" charset="0"/>
                                     </a:rPr>
@@ -9693,7 +9717,7 @@
                                   <m:sSub>
                                     <m:sSubPr>
                                       <m:ctrlPr>
-                                        <a:rPr lang="en-HK" altLang="zh-Hans-HK" sz="2200" b="1" i="0" smtClean="0">
+                                        <a:rPr lang="en-HK" altLang="zh-Hans-HK" sz="2200" b="0" i="1" smtClean="0">
                                           <a:latin typeface="Cambria Math" panose="02040503050406030204" pitchFamily="18" charset="0"/>
                                           <a:cs typeface="Times New Roman" panose="02020603050405020304" pitchFamily="18" charset="0"/>
                                         </a:rPr>
@@ -9701,11 +9725,11 @@
                                     </m:sSubPr>
                                     <m:e>
                                       <m:r>
-                                        <a:rPr lang="en-HK" altLang="zh-Hans-HK" sz="2200" b="1" i="0" smtClean="0">
+                                        <a:rPr lang="en-HK" altLang="zh-Hans-HK" sz="2200" b="0" i="1" smtClean="0">
                                           <a:latin typeface="Cambria Math" panose="02040503050406030204" pitchFamily="18" charset="0"/>
                                           <a:cs typeface="Times New Roman" panose="02020603050405020304" pitchFamily="18" charset="0"/>
                                         </a:rPr>
-                                        <m:t>𝐩</m:t>
+                                        <m:t>𝑝</m:t>
                                       </m:r>
                                     </m:e>
                                     <m:sub>
@@ -9750,7 +9774,7 @@
                                       <m:sSub>
                                         <m:sSubPr>
                                           <m:ctrlPr>
-                                            <a:rPr lang="en-HK" altLang="zh-Hans-HK" sz="2200" b="1" i="0" smtClean="0">
+                                            <a:rPr lang="en-HK" altLang="zh-Hans-HK" sz="2200" b="0" i="1" smtClean="0">
                                               <a:latin typeface="Cambria Math" panose="02040503050406030204" pitchFamily="18" charset="0"/>
                                               <a:cs typeface="Times New Roman" panose="02020603050405020304" pitchFamily="18" charset="0"/>
                                             </a:rPr>
@@ -9758,11 +9782,11 @@
                                         </m:sSubPr>
                                         <m:e>
                                           <m:r>
-                                            <a:rPr lang="en-HK" altLang="zh-Hans-HK" sz="2200" b="1" i="0" smtClean="0">
+                                            <a:rPr lang="en-HK" altLang="zh-Hans-HK" sz="2200" b="0" i="1" smtClean="0">
                                               <a:latin typeface="Cambria Math" panose="02040503050406030204" pitchFamily="18" charset="0"/>
                                               <a:cs typeface="Times New Roman" panose="02020603050405020304" pitchFamily="18" charset="0"/>
                                             </a:rPr>
-                                            <m:t>𝐩</m:t>
+                                            <m:t>𝑝</m:t>
                                           </m:r>
                                         </m:e>
                                         <m:sub>
@@ -9851,7 +9875,7 @@
                               <m:d>
                                 <m:dPr>
                                   <m:ctrlPr>
-                                    <a:rPr lang="en-HK" altLang="zh-Hans-HK" sz="2200" b="0" i="1" smtClean="0">
+                                    <a:rPr lang="en-HK" altLang="zh-Hans-HK" sz="2200" i="1" smtClean="0">
                                       <a:latin typeface="Cambria Math" panose="02040503050406030204" pitchFamily="18" charset="0"/>
                                       <a:ea typeface="Cambria Math" panose="02040503050406030204" pitchFamily="18" charset="0"/>
                                       <a:cs typeface="Times New Roman" panose="02020603050405020304" pitchFamily="18" charset="0"/>
@@ -9893,7 +9917,7 @@
                                   <m:d>
                                     <m:dPr>
                                       <m:ctrlPr>
-                                        <a:rPr lang="en-HK" altLang="zh-Hans-HK" sz="2200" b="1" i="1" smtClean="0">
+                                        <a:rPr lang="en-HK" altLang="zh-Hans-HK" sz="2200" i="1" smtClean="0">
                                           <a:latin typeface="Cambria Math" panose="02040503050406030204" pitchFamily="18" charset="0"/>
                                           <a:cs typeface="Times New Roman" panose="02020603050405020304" pitchFamily="18" charset="0"/>
                                         </a:rPr>
@@ -9903,7 +9927,7 @@
                                       <m:sSub>
                                         <m:sSubPr>
                                           <m:ctrlPr>
-                                            <a:rPr lang="en-HK" altLang="zh-Hans-HK" sz="2200" b="1" i="0" smtClean="0">
+                                            <a:rPr lang="en-HK" altLang="zh-Hans-HK" sz="2200" b="0" i="1" smtClean="0">
                                               <a:latin typeface="Cambria Math" panose="02040503050406030204" pitchFamily="18" charset="0"/>
                                               <a:cs typeface="Times New Roman" panose="02020603050405020304" pitchFamily="18" charset="0"/>
                                             </a:rPr>
@@ -9911,11 +9935,11 @@
                                         </m:sSubPr>
                                         <m:e>
                                           <m:r>
-                                            <a:rPr lang="en-HK" altLang="zh-Hans-HK" sz="2200" b="1" i="0" smtClean="0">
+                                            <a:rPr lang="en-HK" altLang="zh-Hans-HK" sz="2200" b="0" i="1" smtClean="0">
                                               <a:latin typeface="Cambria Math" panose="02040503050406030204" pitchFamily="18" charset="0"/>
                                               <a:cs typeface="Times New Roman" panose="02020603050405020304" pitchFamily="18" charset="0"/>
                                             </a:rPr>
-                                            <m:t>𝐩</m:t>
+                                            <m:t>𝑝</m:t>
                                           </m:r>
                                         </m:e>
                                         <m:sub>
@@ -9942,7 +9966,7 @@
                                       <m:sSub>
                                         <m:sSubPr>
                                           <m:ctrlPr>
-                                            <a:rPr lang="en-HK" altLang="zh-Hans-HK" sz="2200" b="1" i="0" smtClean="0">
+                                            <a:rPr lang="en-HK" altLang="zh-Hans-HK" sz="2200" b="0" i="1" smtClean="0">
                                               <a:latin typeface="Cambria Math" panose="02040503050406030204" pitchFamily="18" charset="0"/>
                                               <a:cs typeface="Times New Roman" panose="02020603050405020304" pitchFamily="18" charset="0"/>
                                             </a:rPr>
@@ -9950,11 +9974,11 @@
                                         </m:sSubPr>
                                         <m:e>
                                           <m:r>
-                                            <a:rPr lang="en-HK" altLang="zh-Hans-HK" sz="2200" b="1" i="0" smtClean="0">
+                                            <a:rPr lang="en-HK" altLang="zh-Hans-HK" sz="2200" b="0" i="1" smtClean="0">
                                               <a:latin typeface="Cambria Math" panose="02040503050406030204" pitchFamily="18" charset="0"/>
                                               <a:cs typeface="Times New Roman" panose="02020603050405020304" pitchFamily="18" charset="0"/>
                                             </a:rPr>
-                                            <m:t>𝐩</m:t>
+                                            <m:t>𝑝</m:t>
                                           </m:r>
                                         </m:e>
                                         <m:sub>
@@ -10004,7 +10028,7 @@
                                   <m:d>
                                     <m:dPr>
                                       <m:ctrlPr>
-                                        <a:rPr lang="en-HK" altLang="zh-Hans-HK" sz="2200" b="0" i="1" smtClean="0">
+                                        <a:rPr lang="en-HK" altLang="zh-Hans-HK" sz="2200" i="1" smtClean="0">
                                           <a:latin typeface="Cambria Math" panose="02040503050406030204" pitchFamily="18" charset="0"/>
                                           <a:cs typeface="Times New Roman" panose="02020603050405020304" pitchFamily="18" charset="0"/>
                                         </a:rPr>
@@ -10033,7 +10057,7 @@
                                           <m:sSub>
                                             <m:sSubPr>
                                               <m:ctrlPr>
-                                                <a:rPr lang="en-HK" altLang="zh-Hans-HK" sz="2200" b="1" i="0" smtClean="0">
+                                                <a:rPr lang="en-HK" altLang="zh-Hans-HK" sz="2200" b="0" i="1" smtClean="0">
                                                   <a:latin typeface="Cambria Math" panose="02040503050406030204" pitchFamily="18" charset="0"/>
                                                   <a:cs typeface="Times New Roman" panose="02020603050405020304" pitchFamily="18" charset="0"/>
                                                 </a:rPr>
@@ -10041,11 +10065,11 @@
                                             </m:sSubPr>
                                             <m:e>
                                               <m:r>
-                                                <a:rPr lang="en-HK" altLang="zh-Hans-HK" sz="2200" b="1" i="0" smtClean="0">
+                                                <a:rPr lang="en-HK" altLang="zh-Hans-HK" sz="2200" b="0" i="1" smtClean="0">
                                                   <a:latin typeface="Cambria Math" panose="02040503050406030204" pitchFamily="18" charset="0"/>
                                                   <a:cs typeface="Times New Roman" panose="02020603050405020304" pitchFamily="18" charset="0"/>
                                                 </a:rPr>
-                                                <m:t>𝐩</m:t>
+                                                <m:t>𝑝</m:t>
                                               </m:r>
                                             </m:e>
                                             <m:sub>
@@ -10089,7 +10113,7 @@
                                           <m:sSub>
                                             <m:sSubPr>
                                               <m:ctrlPr>
-                                                <a:rPr lang="en-HK" altLang="zh-Hans-HK" sz="2200" b="1" i="0" smtClean="0">
+                                                <a:rPr lang="en-HK" altLang="zh-Hans-HK" sz="2200" b="0" i="1" smtClean="0">
                                                   <a:latin typeface="Cambria Math" panose="02040503050406030204" pitchFamily="18" charset="0"/>
                                                   <a:cs typeface="Times New Roman" panose="02020603050405020304" pitchFamily="18" charset="0"/>
                                                 </a:rPr>
@@ -10097,11 +10121,11 @@
                                             </m:sSubPr>
                                             <m:e>
                                               <m:r>
-                                                <a:rPr lang="en-HK" altLang="zh-Hans-HK" sz="2200" b="1" i="0" smtClean="0">
+                                                <a:rPr lang="en-HK" altLang="zh-Hans-HK" sz="2200" b="0" i="1" smtClean="0">
                                                   <a:latin typeface="Cambria Math" panose="02040503050406030204" pitchFamily="18" charset="0"/>
                                                   <a:cs typeface="Times New Roman" panose="02020603050405020304" pitchFamily="18" charset="0"/>
                                                 </a:rPr>
-                                                <m:t>𝐩</m:t>
+                                                <m:t>𝑝</m:t>
                                               </m:r>
                                             </m:e>
                                             <m:sub>
@@ -10148,7 +10172,7 @@
             </p:txBody>
           </p:sp>
         </mc:Choice>
-        <mc:Fallback xmlns="">
+        <mc:Fallback>
           <p:sp>
             <p:nvSpPr>
               <p:cNvPr id="7" name="TextBox 6">
@@ -10183,7 +10207,7 @@
               <a:lstStyle/>
               <a:p>
                 <a:r>
-                  <a:rPr lang="zh-Hans-HK" altLang="en-US">
+                  <a:rPr lang="zh-CN" altLang="en-US">
                     <a:noFill/>
                   </a:rPr>
                   <a:t> </a:t>

--- a/publication/EARTH_presentation.pptx
+++ b/publication/EARTH_presentation.pptx
@@ -134,7 +134,7 @@
 <file path=ppt/revisionInfo.xml><?xml version="1.0" encoding="utf-8"?>
 <p1510:revInfo xmlns:a="http://schemas.openxmlformats.org/drawingml/2006/main" xmlns:r="http://schemas.openxmlformats.org/officeDocument/2006/relationships" xmlns:p1510="http://schemas.microsoft.com/office/powerpoint/2015/10/main">
   <p1510:revLst>
-    <p1510:client id="{0729CCF5-1BFF-44A5-9BA5-7CE0202E4242}" v="39" dt="2026-08-10T15:34:04.929"/>
+    <p1510:client id="{0729CCF5-1BFF-44A5-9BA5-7CE0202E4242}" v="50" dt="2026-08-10T15:41:44.147"/>
   </p1510:revLst>
 </p1510:revInfo>
 </file>
@@ -144,18 +144,18 @@
   <pc:docChgLst>
     <pc:chgData name="Tsz Nam Chan" userId="d72bc0ce159372cc" providerId="LiveId" clId="{D0A54EB6-4CA2-42C5-ABC6-C64AAD2F7BCD}"/>
     <pc:docChg chg="modSld">
-      <pc:chgData name="Tsz Nam Chan" userId="d72bc0ce159372cc" providerId="LiveId" clId="{D0A54EB6-4CA2-42C5-ABC6-C64AAD2F7BCD}" dt="2026-08-10T15:34:04.929" v="38" actId="114"/>
+      <pc:chgData name="Tsz Nam Chan" userId="d72bc0ce159372cc" providerId="LiveId" clId="{D0A54EB6-4CA2-42C5-ABC6-C64AAD2F7BCD}" dt="2026-08-10T15:41:44.147" v="49"/>
       <pc:docMkLst>
         <pc:docMk/>
       </pc:docMkLst>
       <pc:sldChg chg="modSp">
-        <pc:chgData name="Tsz Nam Chan" userId="d72bc0ce159372cc" providerId="LiveId" clId="{D0A54EB6-4CA2-42C5-ABC6-C64AAD2F7BCD}" dt="2026-08-10T15:32:35.577" v="28" actId="114"/>
+        <pc:chgData name="Tsz Nam Chan" userId="d72bc0ce159372cc" providerId="LiveId" clId="{D0A54EB6-4CA2-42C5-ABC6-C64AAD2F7BCD}" dt="2026-08-10T15:40:36.865" v="45"/>
         <pc:sldMkLst>
           <pc:docMk/>
           <pc:sldMk cId="3206141009" sldId="262"/>
         </pc:sldMkLst>
         <pc:spChg chg="mod">
-          <ac:chgData name="Tsz Nam Chan" userId="d72bc0ce159372cc" providerId="LiveId" clId="{D0A54EB6-4CA2-42C5-ABC6-C64AAD2F7BCD}" dt="2026-08-10T15:31:44.818" v="20" actId="114"/>
+          <ac:chgData name="Tsz Nam Chan" userId="d72bc0ce159372cc" providerId="LiveId" clId="{D0A54EB6-4CA2-42C5-ABC6-C64AAD2F7BCD}" dt="2026-08-10T15:40:13.456" v="41"/>
           <ac:spMkLst>
             <pc:docMk/>
             <pc:sldMk cId="3206141009" sldId="262"/>
@@ -163,7 +163,7 @@
           </ac:spMkLst>
         </pc:spChg>
         <pc:spChg chg="mod">
-          <ac:chgData name="Tsz Nam Chan" userId="d72bc0ce159372cc" providerId="LiveId" clId="{D0A54EB6-4CA2-42C5-ABC6-C64AAD2F7BCD}" dt="2026-08-10T15:32:35.577" v="28" actId="114"/>
+          <ac:chgData name="Tsz Nam Chan" userId="d72bc0ce159372cc" providerId="LiveId" clId="{D0A54EB6-4CA2-42C5-ABC6-C64AAD2F7BCD}" dt="2026-08-10T15:40:36.865" v="45"/>
           <ac:spMkLst>
             <pc:docMk/>
             <pc:sldMk cId="3206141009" sldId="262"/>
@@ -172,13 +172,13 @@
         </pc:spChg>
       </pc:sldChg>
       <pc:sldChg chg="modSp">
-        <pc:chgData name="Tsz Nam Chan" userId="d72bc0ce159372cc" providerId="LiveId" clId="{D0A54EB6-4CA2-42C5-ABC6-C64AAD2F7BCD}" dt="2026-08-10T15:33:36.495" v="34" actId="114"/>
+        <pc:chgData name="Tsz Nam Chan" userId="d72bc0ce159372cc" providerId="LiveId" clId="{D0A54EB6-4CA2-42C5-ABC6-C64AAD2F7BCD}" dt="2026-08-10T15:41:23.109" v="47"/>
         <pc:sldMkLst>
           <pc:docMk/>
           <pc:sldMk cId="3349179287" sldId="267"/>
         </pc:sldMkLst>
         <pc:spChg chg="mod">
-          <ac:chgData name="Tsz Nam Chan" userId="d72bc0ce159372cc" providerId="LiveId" clId="{D0A54EB6-4CA2-42C5-ABC6-C64AAD2F7BCD}" dt="2026-08-10T15:33:36.495" v="34" actId="114"/>
+          <ac:chgData name="Tsz Nam Chan" userId="d72bc0ce159372cc" providerId="LiveId" clId="{D0A54EB6-4CA2-42C5-ABC6-C64AAD2F7BCD}" dt="2026-08-10T15:41:23.109" v="47"/>
           <ac:spMkLst>
             <pc:docMk/>
             <pc:sldMk cId="3349179287" sldId="267"/>
@@ -187,13 +187,13 @@
         </pc:spChg>
       </pc:sldChg>
       <pc:sldChg chg="modSp">
-        <pc:chgData name="Tsz Nam Chan" userId="d72bc0ce159372cc" providerId="LiveId" clId="{D0A54EB6-4CA2-42C5-ABC6-C64AAD2F7BCD}" dt="2026-08-10T15:34:04.929" v="38" actId="114"/>
+        <pc:chgData name="Tsz Nam Chan" userId="d72bc0ce159372cc" providerId="LiveId" clId="{D0A54EB6-4CA2-42C5-ABC6-C64AAD2F7BCD}" dt="2026-08-10T15:41:44.147" v="49"/>
         <pc:sldMkLst>
           <pc:docMk/>
           <pc:sldMk cId="1944472154" sldId="268"/>
         </pc:sldMkLst>
         <pc:spChg chg="mod">
-          <ac:chgData name="Tsz Nam Chan" userId="d72bc0ce159372cc" providerId="LiveId" clId="{D0A54EB6-4CA2-42C5-ABC6-C64AAD2F7BCD}" dt="2026-08-10T15:34:04.929" v="38" actId="114"/>
+          <ac:chgData name="Tsz Nam Chan" userId="d72bc0ce159372cc" providerId="LiveId" clId="{D0A54EB6-4CA2-42C5-ABC6-C64AAD2F7BCD}" dt="2026-08-10T15:41:44.147" v="49"/>
           <ac:spMkLst>
             <pc:docMk/>
             <pc:sldMk cId="1944472154" sldId="268"/>
@@ -5032,19 +5032,21 @@
                     <m:sSub>
                       <m:sSubPr>
                         <m:ctrlPr>
-                          <a:rPr lang="en-HK" altLang="zh-Hans-HK" b="0" i="1">
+                          <a:rPr lang="en-HK" altLang="zh-Hans-HK" i="1">
                             <a:latin typeface="Cambria Math" panose="02040503050406030204" pitchFamily="18" charset="0"/>
+                            <a:ea typeface="Cambria Math" panose="02040503050406030204" pitchFamily="18" charset="0"/>
                             <a:cs typeface="Times New Roman" panose="02020603050405020304" pitchFamily="18" charset="0"/>
                           </a:rPr>
                         </m:ctrlPr>
                       </m:sSubPr>
                       <m:e>
                         <m:r>
-                          <a:rPr lang="en-HK" altLang="zh-Hans-HK" b="0" i="1">
+                          <a:rPr lang="en-HK" altLang="zh-Hans-HK" i="1">
                             <a:latin typeface="Cambria Math" panose="02040503050406030204" pitchFamily="18" charset="0"/>
+                            <a:ea typeface="Cambria Math" panose="02040503050406030204" pitchFamily="18" charset="0"/>
                             <a:cs typeface="Times New Roman" panose="02020603050405020304" pitchFamily="18" charset="0"/>
                           </a:rPr>
-                          <m:t>𝑡</m:t>
+                          <m:t>𝜏</m:t>
                         </m:r>
                       </m:e>
                       <m:sub>
@@ -5142,19 +5144,21 @@
                     <m:sSub>
                       <m:sSubPr>
                         <m:ctrlPr>
-                          <a:rPr lang="en-HK" altLang="zh-Hans-HK" b="0" i="1" smtClean="0">
+                          <a:rPr lang="en-HK" altLang="zh-Hans-HK" i="1">
                             <a:latin typeface="Cambria Math" panose="02040503050406030204" pitchFamily="18" charset="0"/>
+                            <a:ea typeface="Cambria Math" panose="02040503050406030204" pitchFamily="18" charset="0"/>
                             <a:cs typeface="Times New Roman" panose="02020603050405020304" pitchFamily="18" charset="0"/>
                           </a:rPr>
                         </m:ctrlPr>
                       </m:sSubPr>
                       <m:e>
                         <m:r>
-                          <a:rPr lang="en-HK" altLang="zh-Hans-HK" b="0" i="1" smtClean="0">
+                          <a:rPr lang="en-HK" altLang="zh-Hans-HK" i="1">
                             <a:latin typeface="Cambria Math" panose="02040503050406030204" pitchFamily="18" charset="0"/>
+                            <a:ea typeface="Cambria Math" panose="02040503050406030204" pitchFamily="18" charset="0"/>
                             <a:cs typeface="Times New Roman" panose="02020603050405020304" pitchFamily="18" charset="0"/>
                           </a:rPr>
-                          <m:t>𝑡</m:t>
+                          <m:t>𝜏</m:t>
                         </m:r>
                       </m:e>
                       <m:sub>
@@ -5718,19 +5722,21 @@
                     <m:sSub>
                       <m:sSubPr>
                         <m:ctrlPr>
-                          <a:rPr lang="en-HK" altLang="zh-Hans-HK" b="0" i="1" smtClean="0">
+                          <a:rPr lang="en-HK" altLang="zh-Hans-HK" i="1">
                             <a:latin typeface="Cambria Math" panose="02040503050406030204" pitchFamily="18" charset="0"/>
+                            <a:ea typeface="Cambria Math" panose="02040503050406030204" pitchFamily="18" charset="0"/>
                             <a:cs typeface="Times New Roman" panose="02020603050405020304" pitchFamily="18" charset="0"/>
                           </a:rPr>
                         </m:ctrlPr>
                       </m:sSubPr>
                       <m:e>
                         <m:r>
-                          <a:rPr lang="en-HK" altLang="zh-Hans-HK" b="0" i="1" smtClean="0">
+                          <a:rPr lang="en-HK" altLang="zh-Hans-HK" i="1">
                             <a:latin typeface="Cambria Math" panose="02040503050406030204" pitchFamily="18" charset="0"/>
+                            <a:ea typeface="Cambria Math" panose="02040503050406030204" pitchFamily="18" charset="0"/>
                             <a:cs typeface="Times New Roman" panose="02020603050405020304" pitchFamily="18" charset="0"/>
                           </a:rPr>
-                          <m:t>𝑡</m:t>
+                          <m:t>𝜏</m:t>
                         </m:r>
                       </m:e>
                       <m:sub>
@@ -5842,19 +5848,21 @@
                     <m:sSub>
                       <m:sSubPr>
                         <m:ctrlPr>
-                          <a:rPr lang="en-HK" altLang="zh-Hans-HK" b="0" i="1" smtClean="0">
+                          <a:rPr lang="en-HK" altLang="zh-Hans-HK" i="1">
                             <a:latin typeface="Cambria Math" panose="02040503050406030204" pitchFamily="18" charset="0"/>
+                            <a:ea typeface="Cambria Math" panose="02040503050406030204" pitchFamily="18" charset="0"/>
                             <a:cs typeface="Times New Roman" panose="02020603050405020304" pitchFamily="18" charset="0"/>
                           </a:rPr>
                         </m:ctrlPr>
                       </m:sSubPr>
                       <m:e>
                         <m:r>
-                          <a:rPr lang="en-HK" altLang="zh-Hans-HK" b="0" i="1" smtClean="0">
+                          <a:rPr lang="en-HK" altLang="zh-Hans-HK" i="1">
                             <a:latin typeface="Cambria Math" panose="02040503050406030204" pitchFamily="18" charset="0"/>
+                            <a:ea typeface="Cambria Math" panose="02040503050406030204" pitchFamily="18" charset="0"/>
                             <a:cs typeface="Times New Roman" panose="02020603050405020304" pitchFamily="18" charset="0"/>
                           </a:rPr>
-                          <m:t>𝑡</m:t>
+                          <m:t>𝜏</m:t>
                         </m:r>
                       </m:e>
                       <m:sub>
@@ -8978,6 +8986,7 @@
                                 <m:ctrlPr>
                                   <a:rPr lang="en-HK" altLang="zh-Hans-HK" b="0" i="1" smtClean="0">
                                     <a:latin typeface="Cambria Math" panose="02040503050406030204" pitchFamily="18" charset="0"/>
+                                    <a:ea typeface="Cambria Math" panose="02040503050406030204" pitchFamily="18" charset="0"/>
                                     <a:cs typeface="Times New Roman" panose="02020603050405020304" pitchFamily="18" charset="0"/>
                                   </a:rPr>
                                 </m:ctrlPr>
@@ -8986,9 +8995,10 @@
                                 <m:r>
                                   <a:rPr lang="en-HK" altLang="zh-Hans-HK" b="0" i="1" smtClean="0">
                                     <a:latin typeface="Cambria Math" panose="02040503050406030204" pitchFamily="18" charset="0"/>
+                                    <a:ea typeface="Cambria Math" panose="02040503050406030204" pitchFamily="18" charset="0"/>
                                     <a:cs typeface="Times New Roman" panose="02020603050405020304" pitchFamily="18" charset="0"/>
                                   </a:rPr>
-                                  <m:t>𝑡</m:t>
+                                  <m:t>𝜏</m:t>
                                 </m:r>
                               </m:e>
                               <m:sub>
@@ -9079,19 +9089,21 @@
                             <m:sSub>
                               <m:sSubPr>
                                 <m:ctrlPr>
-                                  <a:rPr lang="en-HK" altLang="zh-Hans-HK" b="0" i="1" smtClean="0">
+                                  <a:rPr lang="en-HK" altLang="zh-Hans-HK" i="1">
                                     <a:latin typeface="Cambria Math" panose="02040503050406030204" pitchFamily="18" charset="0"/>
+                                    <a:ea typeface="Cambria Math" panose="02040503050406030204" pitchFamily="18" charset="0"/>
                                     <a:cs typeface="Times New Roman" panose="02020603050405020304" pitchFamily="18" charset="0"/>
                                   </a:rPr>
                                 </m:ctrlPr>
                               </m:sSubPr>
                               <m:e>
                                 <m:r>
-                                  <a:rPr lang="en-HK" altLang="zh-Hans-HK" b="0" i="1" smtClean="0">
+                                  <a:rPr lang="en-HK" altLang="zh-Hans-HK" i="1">
                                     <a:latin typeface="Cambria Math" panose="02040503050406030204" pitchFamily="18" charset="0"/>
+                                    <a:ea typeface="Cambria Math" panose="02040503050406030204" pitchFamily="18" charset="0"/>
                                     <a:cs typeface="Times New Roman" panose="02020603050405020304" pitchFamily="18" charset="0"/>
                                   </a:rPr>
-                                  <m:t>𝑡</m:t>
+                                  <m:t>𝜏</m:t>
                                 </m:r>
                               </m:e>
                               <m:sub>
@@ -9182,19 +9194,21 @@
                             <m:sSub>
                               <m:sSubPr>
                                 <m:ctrlPr>
-                                  <a:rPr lang="en-HK" altLang="zh-Hans-HK" b="0" i="1" smtClean="0">
+                                  <a:rPr lang="en-HK" altLang="zh-Hans-HK" i="1">
                                     <a:latin typeface="Cambria Math" panose="02040503050406030204" pitchFamily="18" charset="0"/>
+                                    <a:ea typeface="Cambria Math" panose="02040503050406030204" pitchFamily="18" charset="0"/>
                                     <a:cs typeface="Times New Roman" panose="02020603050405020304" pitchFamily="18" charset="0"/>
                                   </a:rPr>
                                 </m:ctrlPr>
                               </m:sSubPr>
                               <m:e>
                                 <m:r>
-                                  <a:rPr lang="en-HK" altLang="zh-Hans-HK" b="0" i="1" smtClean="0">
+                                  <a:rPr lang="en-HK" altLang="zh-Hans-HK" i="1">
                                     <a:latin typeface="Cambria Math" panose="02040503050406030204" pitchFamily="18" charset="0"/>
+                                    <a:ea typeface="Cambria Math" panose="02040503050406030204" pitchFamily="18" charset="0"/>
                                     <a:cs typeface="Times New Roman" panose="02020603050405020304" pitchFamily="18" charset="0"/>
                                   </a:rPr>
-                                  <m:t>𝑡</m:t>
+                                  <m:t>𝜏</m:t>
                                 </m:r>
                               </m:e>
                               <m:sub>
@@ -9601,19 +9615,21 @@
                           <m:sSub>
                             <m:sSubPr>
                               <m:ctrlPr>
-                                <a:rPr lang="en-HK" altLang="zh-Hans-HK" sz="2200" b="0" i="1" smtClean="0">
+                                <a:rPr lang="en-HK" altLang="zh-Hans-HK" sz="2400" i="1">
                                   <a:latin typeface="Cambria Math" panose="02040503050406030204" pitchFamily="18" charset="0"/>
+                                  <a:ea typeface="Cambria Math" panose="02040503050406030204" pitchFamily="18" charset="0"/>
                                   <a:cs typeface="Times New Roman" panose="02020603050405020304" pitchFamily="18" charset="0"/>
                                 </a:rPr>
                               </m:ctrlPr>
                             </m:sSubPr>
                             <m:e>
                               <m:r>
-                                <a:rPr lang="en-HK" altLang="zh-Hans-HK" sz="2200" b="0" i="1" smtClean="0">
+                                <a:rPr lang="en-HK" altLang="zh-Hans-HK" sz="2400" i="1">
                                   <a:latin typeface="Cambria Math" panose="02040503050406030204" pitchFamily="18" charset="0"/>
+                                  <a:ea typeface="Cambria Math" panose="02040503050406030204" pitchFamily="18" charset="0"/>
                                   <a:cs typeface="Times New Roman" panose="02020603050405020304" pitchFamily="18" charset="0"/>
                                 </a:rPr>
-                                <m:t>𝑡</m:t>
+                                <m:t>𝜏</m:t>
                               </m:r>
                             </m:e>
                             <m:sub>
@@ -9755,19 +9771,21 @@
                                   <m:sSub>
                                     <m:sSubPr>
                                       <m:ctrlPr>
-                                        <a:rPr lang="en-HK" altLang="zh-Hans-HK" sz="2200" b="0" i="1" smtClean="0">
+                                        <a:rPr lang="en-HK" altLang="zh-Hans-HK" sz="2400" i="1">
                                           <a:latin typeface="Cambria Math" panose="02040503050406030204" pitchFamily="18" charset="0"/>
+                                          <a:ea typeface="Cambria Math" panose="02040503050406030204" pitchFamily="18" charset="0"/>
                                           <a:cs typeface="Times New Roman" panose="02020603050405020304" pitchFamily="18" charset="0"/>
                                         </a:rPr>
                                       </m:ctrlPr>
                                     </m:sSubPr>
                                     <m:e>
                                       <m:r>
-                                        <a:rPr lang="en-HK" altLang="zh-Hans-HK" sz="2200" b="0" i="1" smtClean="0">
+                                        <a:rPr lang="en-HK" altLang="zh-Hans-HK" sz="2400" i="1">
                                           <a:latin typeface="Cambria Math" panose="02040503050406030204" pitchFamily="18" charset="0"/>
+                                          <a:ea typeface="Cambria Math" panose="02040503050406030204" pitchFamily="18" charset="0"/>
                                           <a:cs typeface="Times New Roman" panose="02020603050405020304" pitchFamily="18" charset="0"/>
                                         </a:rPr>
-                                        <m:t>𝑡</m:t>
+                                        <m:t>𝜏</m:t>
                                       </m:r>
                                     </m:e>
                                     <m:sub>
@@ -10038,19 +10056,21 @@
                                       <m:sSub>
                                         <m:sSubPr>
                                           <m:ctrlPr>
-                                            <a:rPr lang="en-HK" altLang="zh-Hans-HK" sz="2200" b="0" i="1" smtClean="0">
+                                            <a:rPr lang="en-HK" altLang="zh-Hans-HK" sz="2400" i="1">
                                               <a:latin typeface="Cambria Math" panose="02040503050406030204" pitchFamily="18" charset="0"/>
+                                              <a:ea typeface="Cambria Math" panose="02040503050406030204" pitchFamily="18" charset="0"/>
                                               <a:cs typeface="Times New Roman" panose="02020603050405020304" pitchFamily="18" charset="0"/>
                                             </a:rPr>
                                           </m:ctrlPr>
                                         </m:sSubPr>
                                         <m:e>
                                           <m:r>
-                                            <a:rPr lang="en-HK" altLang="zh-Hans-HK" sz="2200" b="0" i="1" smtClean="0">
+                                            <a:rPr lang="en-HK" altLang="zh-Hans-HK" sz="2400" i="1">
                                               <a:latin typeface="Cambria Math" panose="02040503050406030204" pitchFamily="18" charset="0"/>
+                                              <a:ea typeface="Cambria Math" panose="02040503050406030204" pitchFamily="18" charset="0"/>
                                               <a:cs typeface="Times New Roman" panose="02020603050405020304" pitchFamily="18" charset="0"/>
                                             </a:rPr>
-                                            <m:t>𝑡</m:t>
+                                            <m:t>𝜏</m:t>
                                           </m:r>
                                         </m:e>
                                         <m:sub>
@@ -10094,19 +10114,21 @@
                                       <m:sSub>
                                         <m:sSubPr>
                                           <m:ctrlPr>
-                                            <a:rPr lang="en-HK" altLang="zh-Hans-HK" sz="2200" b="0" i="1" smtClean="0">
+                                            <a:rPr lang="en-HK" altLang="zh-Hans-HK" sz="2400" i="1">
                                               <a:latin typeface="Cambria Math" panose="02040503050406030204" pitchFamily="18" charset="0"/>
+                                              <a:ea typeface="Cambria Math" panose="02040503050406030204" pitchFamily="18" charset="0"/>
                                               <a:cs typeface="Times New Roman" panose="02020603050405020304" pitchFamily="18" charset="0"/>
                                             </a:rPr>
                                           </m:ctrlPr>
                                         </m:sSubPr>
                                         <m:e>
                                           <m:r>
-                                            <a:rPr lang="en-HK" altLang="zh-Hans-HK" sz="2200" b="0" i="1" smtClean="0">
+                                            <a:rPr lang="en-HK" altLang="zh-Hans-HK" sz="2400" i="1">
                                               <a:latin typeface="Cambria Math" panose="02040503050406030204" pitchFamily="18" charset="0"/>
+                                              <a:ea typeface="Cambria Math" panose="02040503050406030204" pitchFamily="18" charset="0"/>
                                               <a:cs typeface="Times New Roman" panose="02020603050405020304" pitchFamily="18" charset="0"/>
                                             </a:rPr>
-                                            <m:t>𝑡</m:t>
+                                            <m:t>𝜏</m:t>
                                           </m:r>
                                         </m:e>
                                         <m:sub>

--- a/publication/EARTH_presentation.pptx
+++ b/publication/EARTH_presentation.pptx
@@ -141,68 +141,6 @@
 
 <file path=ppt/changesInfos/changesInfo1.xml><?xml version="1.0" encoding="utf-8"?>
 <pc:chgInfo xmlns:a="http://schemas.openxmlformats.org/drawingml/2006/main" xmlns:r="http://schemas.openxmlformats.org/officeDocument/2006/relationships" xmlns:ac="http://schemas.microsoft.com/office/drawing/2013/main/command" xmlns:pc="http://schemas.microsoft.com/office/powerpoint/2013/main/command">
-  <pc:docChgLst>
-    <pc:chgData name="Tsz Nam Chan" userId="d72bc0ce159372cc" providerId="LiveId" clId="{D0A54EB6-4CA2-42C5-ABC6-C64AAD2F7BCD}"/>
-    <pc:docChg chg="modSld">
-      <pc:chgData name="Tsz Nam Chan" userId="d72bc0ce159372cc" providerId="LiveId" clId="{D0A54EB6-4CA2-42C5-ABC6-C64AAD2F7BCD}" dt="2026-08-10T15:41:44.147" v="49"/>
-      <pc:docMkLst>
-        <pc:docMk/>
-      </pc:docMkLst>
-      <pc:sldChg chg="modSp">
-        <pc:chgData name="Tsz Nam Chan" userId="d72bc0ce159372cc" providerId="LiveId" clId="{D0A54EB6-4CA2-42C5-ABC6-C64AAD2F7BCD}" dt="2026-08-10T15:40:36.865" v="45"/>
-        <pc:sldMkLst>
-          <pc:docMk/>
-          <pc:sldMk cId="3206141009" sldId="262"/>
-        </pc:sldMkLst>
-        <pc:spChg chg="mod">
-          <ac:chgData name="Tsz Nam Chan" userId="d72bc0ce159372cc" providerId="LiveId" clId="{D0A54EB6-4CA2-42C5-ABC6-C64AAD2F7BCD}" dt="2026-08-10T15:40:13.456" v="41"/>
-          <ac:spMkLst>
-            <pc:docMk/>
-            <pc:sldMk cId="3206141009" sldId="262"/>
-            <ac:spMk id="3" creationId="{2A485A92-FE14-44EB-7F5C-A418B5BBB968}"/>
-          </ac:spMkLst>
-        </pc:spChg>
-        <pc:spChg chg="mod">
-          <ac:chgData name="Tsz Nam Chan" userId="d72bc0ce159372cc" providerId="LiveId" clId="{D0A54EB6-4CA2-42C5-ABC6-C64AAD2F7BCD}" dt="2026-08-10T15:40:36.865" v="45"/>
-          <ac:spMkLst>
-            <pc:docMk/>
-            <pc:sldMk cId="3206141009" sldId="262"/>
-            <ac:spMk id="7" creationId="{23842B56-793E-F748-06A6-2128ED6DBCBF}"/>
-          </ac:spMkLst>
-        </pc:spChg>
-      </pc:sldChg>
-      <pc:sldChg chg="modSp">
-        <pc:chgData name="Tsz Nam Chan" userId="d72bc0ce159372cc" providerId="LiveId" clId="{D0A54EB6-4CA2-42C5-ABC6-C64AAD2F7BCD}" dt="2026-08-10T15:41:23.109" v="47"/>
-        <pc:sldMkLst>
-          <pc:docMk/>
-          <pc:sldMk cId="3349179287" sldId="267"/>
-        </pc:sldMkLst>
-        <pc:spChg chg="mod">
-          <ac:chgData name="Tsz Nam Chan" userId="d72bc0ce159372cc" providerId="LiveId" clId="{D0A54EB6-4CA2-42C5-ABC6-C64AAD2F7BCD}" dt="2026-08-10T15:41:23.109" v="47"/>
-          <ac:spMkLst>
-            <pc:docMk/>
-            <pc:sldMk cId="3349179287" sldId="267"/>
-            <ac:spMk id="3" creationId="{69304792-F9FA-57DA-961F-60CD299E5733}"/>
-          </ac:spMkLst>
-        </pc:spChg>
-      </pc:sldChg>
-      <pc:sldChg chg="modSp">
-        <pc:chgData name="Tsz Nam Chan" userId="d72bc0ce159372cc" providerId="LiveId" clId="{D0A54EB6-4CA2-42C5-ABC6-C64AAD2F7BCD}" dt="2026-08-10T15:41:44.147" v="49"/>
-        <pc:sldMkLst>
-          <pc:docMk/>
-          <pc:sldMk cId="1944472154" sldId="268"/>
-        </pc:sldMkLst>
-        <pc:spChg chg="mod">
-          <ac:chgData name="Tsz Nam Chan" userId="d72bc0ce159372cc" providerId="LiveId" clId="{D0A54EB6-4CA2-42C5-ABC6-C64AAD2F7BCD}" dt="2026-08-10T15:41:44.147" v="49"/>
-          <ac:spMkLst>
-            <pc:docMk/>
-            <pc:sldMk cId="1944472154" sldId="268"/>
-            <ac:spMk id="8" creationId="{07E56B51-3549-54F9-FFFB-B4DA5CB7D2FF}"/>
-          </ac:spMkLst>
-        </pc:spChg>
-      </pc:sldChg>
-    </pc:docChg>
-  </pc:docChgLst>
   <pc:docChgLst>
     <pc:chgData name="Tsz Nam Chan" userId="d72bc0ce159372cc" providerId="LiveId" clId="{7EA772CB-F43F-45EA-8D4F-488304E9E5E6}"/>
     <pc:docChg chg="undo redo custSel addSld delSld modSld">
@@ -526,6 +464,68 @@
           <pc:docMk/>
           <pc:sldMk cId="3277184418" sldId="282"/>
         </pc:sldMkLst>
+      </pc:sldChg>
+    </pc:docChg>
+  </pc:docChgLst>
+  <pc:docChgLst>
+    <pc:chgData name="Tsz Nam Chan" userId="d72bc0ce159372cc" providerId="LiveId" clId="{D0A54EB6-4CA2-42C5-ABC6-C64AAD2F7BCD}"/>
+    <pc:docChg chg="modSld">
+      <pc:chgData name="Tsz Nam Chan" userId="d72bc0ce159372cc" providerId="LiveId" clId="{D0A54EB6-4CA2-42C5-ABC6-C64AAD2F7BCD}" dt="2026-08-10T15:41:44.147" v="49"/>
+      <pc:docMkLst>
+        <pc:docMk/>
+      </pc:docMkLst>
+      <pc:sldChg chg="modSp">
+        <pc:chgData name="Tsz Nam Chan" userId="d72bc0ce159372cc" providerId="LiveId" clId="{D0A54EB6-4CA2-42C5-ABC6-C64AAD2F7BCD}" dt="2026-08-10T15:40:36.865" v="45"/>
+        <pc:sldMkLst>
+          <pc:docMk/>
+          <pc:sldMk cId="3206141009" sldId="262"/>
+        </pc:sldMkLst>
+        <pc:spChg chg="mod">
+          <ac:chgData name="Tsz Nam Chan" userId="d72bc0ce159372cc" providerId="LiveId" clId="{D0A54EB6-4CA2-42C5-ABC6-C64AAD2F7BCD}" dt="2026-08-10T15:40:13.456" v="41"/>
+          <ac:spMkLst>
+            <pc:docMk/>
+            <pc:sldMk cId="3206141009" sldId="262"/>
+            <ac:spMk id="3" creationId="{2A485A92-FE14-44EB-7F5C-A418B5BBB968}"/>
+          </ac:spMkLst>
+        </pc:spChg>
+        <pc:spChg chg="mod">
+          <ac:chgData name="Tsz Nam Chan" userId="d72bc0ce159372cc" providerId="LiveId" clId="{D0A54EB6-4CA2-42C5-ABC6-C64AAD2F7BCD}" dt="2026-08-10T15:40:36.865" v="45"/>
+          <ac:spMkLst>
+            <pc:docMk/>
+            <pc:sldMk cId="3206141009" sldId="262"/>
+            <ac:spMk id="7" creationId="{23842B56-793E-F748-06A6-2128ED6DBCBF}"/>
+          </ac:spMkLst>
+        </pc:spChg>
+      </pc:sldChg>
+      <pc:sldChg chg="modSp">
+        <pc:chgData name="Tsz Nam Chan" userId="d72bc0ce159372cc" providerId="LiveId" clId="{D0A54EB6-4CA2-42C5-ABC6-C64AAD2F7BCD}" dt="2026-08-10T15:41:23.109" v="47"/>
+        <pc:sldMkLst>
+          <pc:docMk/>
+          <pc:sldMk cId="3349179287" sldId="267"/>
+        </pc:sldMkLst>
+        <pc:spChg chg="mod">
+          <ac:chgData name="Tsz Nam Chan" userId="d72bc0ce159372cc" providerId="LiveId" clId="{D0A54EB6-4CA2-42C5-ABC6-C64AAD2F7BCD}" dt="2026-08-10T15:41:23.109" v="47"/>
+          <ac:spMkLst>
+            <pc:docMk/>
+            <pc:sldMk cId="3349179287" sldId="267"/>
+            <ac:spMk id="3" creationId="{69304792-F9FA-57DA-961F-60CD299E5733}"/>
+          </ac:spMkLst>
+        </pc:spChg>
+      </pc:sldChg>
+      <pc:sldChg chg="modSp">
+        <pc:chgData name="Tsz Nam Chan" userId="d72bc0ce159372cc" providerId="LiveId" clId="{D0A54EB6-4CA2-42C5-ABC6-C64AAD2F7BCD}" dt="2026-08-10T15:41:44.147" v="49"/>
+        <pc:sldMkLst>
+          <pc:docMk/>
+          <pc:sldMk cId="1944472154" sldId="268"/>
+        </pc:sldMkLst>
+        <pc:spChg chg="mod">
+          <ac:chgData name="Tsz Nam Chan" userId="d72bc0ce159372cc" providerId="LiveId" clId="{D0A54EB6-4CA2-42C5-ABC6-C64AAD2F7BCD}" dt="2026-08-10T15:41:44.147" v="49"/>
+          <ac:spMkLst>
+            <pc:docMk/>
+            <pc:sldMk cId="1944472154" sldId="268"/>
+            <ac:spMk id="8" creationId="{07E56B51-3549-54F9-FFFB-B4DA5CB7D2FF}"/>
+          </ac:spMkLst>
+        </pc:spChg>
       </pc:sldChg>
     </pc:docChg>
   </pc:docChgLst>
@@ -4955,8 +4955,8 @@
           </a:p>
         </p:txBody>
       </p:sp>
-      <mc:AlternateContent xmlns:mc="http://schemas.openxmlformats.org/markup-compatibility/2006">
-        <mc:Choice xmlns:a14="http://schemas.microsoft.com/office/drawing/2010/main" Requires="a14">
+      <mc:AlternateContent xmlns:mc="http://schemas.openxmlformats.org/markup-compatibility/2006" xmlns:a14="http://schemas.microsoft.com/office/drawing/2010/main">
+        <mc:Choice Requires="a14">
           <p:sp>
             <p:nvSpPr>
               <p:cNvPr id="3" name="Content Placeholder 2">
@@ -5428,7 +5428,7 @@
             </p:txBody>
           </p:sp>
         </mc:Choice>
-        <mc:Fallback>
+        <mc:Fallback xmlns="">
           <p:sp>
             <p:nvSpPr>
               <p:cNvPr id="3" name="Content Placeholder 2">
@@ -5602,8 +5602,8 @@
           </a:p>
         </p:txBody>
       </p:sp>
-      <mc:AlternateContent xmlns:mc="http://schemas.openxmlformats.org/markup-compatibility/2006">
-        <mc:Choice xmlns:a14="http://schemas.microsoft.com/office/drawing/2010/main" Requires="a14">
+      <mc:AlternateContent xmlns:mc="http://schemas.openxmlformats.org/markup-compatibility/2006" xmlns:a14="http://schemas.microsoft.com/office/drawing/2010/main">
+        <mc:Choice Requires="a14">
           <p:sp>
             <p:nvSpPr>
               <p:cNvPr id="8" name="Content Placeholder 2">
@@ -6133,7 +6133,7 @@
             </p:txBody>
           </p:sp>
         </mc:Choice>
-        <mc:Fallback>
+        <mc:Fallback xmlns="">
           <p:sp>
             <p:nvSpPr>
               <p:cNvPr id="8" name="Content Placeholder 2">
@@ -7923,6 +7923,36 @@
           <a:chExt cx="0" cy="0"/>
         </a:xfrm>
       </p:grpSpPr>
+      <p:pic>
+        <p:nvPicPr>
+          <p:cNvPr id="10" name="Picture 9">
+            <a:extLst>
+              <a:ext uri="{FF2B5EF4-FFF2-40B4-BE49-F238E27FC236}">
+                <a16:creationId xmlns:a16="http://schemas.microsoft.com/office/drawing/2014/main" id="{5EDCE2BB-A9A5-3862-1F05-B03BDB06A74C}"/>
+              </a:ext>
+            </a:extLst>
+          </p:cNvPr>
+          <p:cNvPicPr>
+            <a:picLocks noChangeAspect="1"/>
+          </p:cNvPicPr>
+          <p:nvPr/>
+        </p:nvPicPr>
+        <p:blipFill>
+          <a:blip r:embed="rId2"/>
+          <a:stretch>
+            <a:fillRect/>
+          </a:stretch>
+        </p:blipFill>
+        <p:spPr>
+          <a:xfrm>
+            <a:off x="7224946" y="1924717"/>
+            <a:ext cx="4774932" cy="3008566"/>
+          </a:xfrm>
+          <a:prstGeom prst="rect">
+            <a:avLst/>
+          </a:prstGeom>
+        </p:spPr>
+      </p:pic>
       <p:sp>
         <p:nvSpPr>
           <p:cNvPr id="2" name="Title 1">
@@ -8027,38 +8057,8 @@
           </a:p>
         </p:txBody>
       </p:sp>
-      <p:pic>
-        <p:nvPicPr>
-          <p:cNvPr id="5" name="圖片 3">
-            <a:extLst>
-              <a:ext uri="{FF2B5EF4-FFF2-40B4-BE49-F238E27FC236}">
-                <a16:creationId xmlns:a16="http://schemas.microsoft.com/office/drawing/2014/main" id="{D3AC4890-6799-6FA7-4F25-78433506A335}"/>
-              </a:ext>
-            </a:extLst>
-          </p:cNvPr>
-          <p:cNvPicPr>
-            <a:picLocks noChangeAspect="1"/>
-          </p:cNvPicPr>
-          <p:nvPr/>
-        </p:nvPicPr>
-        <p:blipFill>
-          <a:blip r:embed="rId2"/>
-          <a:stretch>
-            <a:fillRect/>
-          </a:stretch>
-        </p:blipFill>
-        <p:spPr>
-          <a:xfrm>
-            <a:off x="7330418" y="1924717"/>
-            <a:ext cx="4572270" cy="3008566"/>
-          </a:xfrm>
-          <a:prstGeom prst="rect">
-            <a:avLst/>
-          </a:prstGeom>
-        </p:spPr>
-      </p:pic>
-      <mc:AlternateContent xmlns:mc="http://schemas.openxmlformats.org/markup-compatibility/2006" xmlns:a14="http://schemas.microsoft.com/office/drawing/2010/main">
-        <mc:Choice Requires="a14">
+      <mc:AlternateContent xmlns:mc="http://schemas.openxmlformats.org/markup-compatibility/2006">
+        <mc:Choice xmlns:a14="http://schemas.microsoft.com/office/drawing/2010/main" Requires="a14">
           <p:sp>
             <p:nvSpPr>
               <p:cNvPr id="7" name="矩形 9">
@@ -8073,8 +8073,8 @@
             </p:nvSpPr>
             <p:spPr>
               <a:xfrm rot="18701841">
-                <a:off x="9982242" y="2873671"/>
-                <a:ext cx="820416" cy="369332"/>
+                <a:off x="9979370" y="2753751"/>
+                <a:ext cx="796180" cy="369332"/>
               </a:xfrm>
               <a:prstGeom prst="rect">
                 <a:avLst/>
@@ -8091,7 +8091,7 @@
                   <m:oMathPara xmlns:m="http://schemas.openxmlformats.org/officeDocument/2006/math">
                     <m:oMath>
                       <m:r>
-                        <a:rPr lang="en-US" altLang="zh-HK" i="1">
+                        <a:rPr lang="en-US" altLang="zh-HK" i="1" smtClean="0">
                           <a:solidFill>
                             <a:srgbClr val="0000CC"/>
                           </a:solidFill>
@@ -8117,7 +8117,7 @@
                           <m:sSub>
                             <m:sSubPr>
                               <m:ctrlPr>
-                                <a:rPr lang="zh-HK" altLang="en-US" i="1">
+                                <a:rPr lang="en-HK" altLang="zh-HK" b="0" i="1" smtClean="0">
                                   <a:solidFill>
                                     <a:srgbClr val="0000CC"/>
                                   </a:solidFill>
@@ -8128,14 +8128,14 @@
                             </m:sSubPr>
                             <m:e>
                               <m:r>
-                                <a:rPr lang="zh-HK" altLang="en-US" i="1">
+                                <a:rPr lang="en-HK" altLang="zh-HK" b="0" i="1" smtClean="0">
                                   <a:solidFill>
                                     <a:srgbClr val="0000CC"/>
                                   </a:solidFill>
                                   <a:latin typeface="Cambria Math" panose="02040503050406030204" pitchFamily="18" charset="0"/>
                                   <a:cs typeface="Times New Roman" panose="02020603050405020304" pitchFamily="18" charset="0"/>
                                 </a:rPr>
-                                <m:t>𝜏</m:t>
+                                <m:t>𝑡</m:t>
                               </m:r>
                             </m:e>
                             <m:sub>
@@ -8161,7 +8161,7 @@
             </p:txBody>
           </p:sp>
         </mc:Choice>
-        <mc:Fallback xmlns="">
+        <mc:Fallback>
           <p:sp>
             <p:nvSpPr>
               <p:cNvPr id="7" name="矩形 9">
@@ -8178,8 +8178,8 @@
             </p:nvSpPr>
             <p:spPr>
               <a:xfrm rot="18701841">
-                <a:off x="9982242" y="2873671"/>
-                <a:ext cx="820416" cy="369332"/>
+                <a:off x="9979370" y="2753751"/>
+                <a:ext cx="796180" cy="369332"/>
               </a:xfrm>
               <a:prstGeom prst="rect">
                 <a:avLst/>
@@ -8196,7 +8196,7 @@
               <a:lstStyle/>
               <a:p>
                 <a:r>
-                  <a:rPr lang="zh-Hans-HK" altLang="en-US">
+                  <a:rPr lang="zh-CN" altLang="en-US">
                     <a:noFill/>
                   </a:rPr>
                   <a:t> </a:t>
@@ -8206,8 +8206,8 @@
           </p:sp>
         </mc:Fallback>
       </mc:AlternateContent>
-      <mc:AlternateContent xmlns:mc="http://schemas.openxmlformats.org/markup-compatibility/2006" xmlns:a14="http://schemas.microsoft.com/office/drawing/2010/main">
-        <mc:Choice Requires="a14">
+      <mc:AlternateContent xmlns:mc="http://schemas.openxmlformats.org/markup-compatibility/2006">
+        <mc:Choice xmlns:a14="http://schemas.microsoft.com/office/drawing/2010/main" Requires="a14">
           <p:sp>
             <p:nvSpPr>
               <p:cNvPr id="9" name="矩形 10">
@@ -8222,8 +8222,8 @@
             </p:nvSpPr>
             <p:spPr>
               <a:xfrm rot="20057880">
-                <a:off x="9216154" y="4135995"/>
-                <a:ext cx="800797" cy="369332"/>
+                <a:off x="9228273" y="4076035"/>
+                <a:ext cx="776559" cy="369332"/>
               </a:xfrm>
               <a:prstGeom prst="rect">
                 <a:avLst/>
@@ -8240,7 +8240,7 @@
                   <m:oMathPara xmlns:m="http://schemas.openxmlformats.org/officeDocument/2006/math">
                     <m:oMath>
                       <m:r>
-                        <a:rPr lang="en-US" altLang="zh-HK" i="1">
+                        <a:rPr lang="en-US" altLang="zh-HK" i="1" smtClean="0">
                           <a:solidFill>
                             <a:srgbClr val="FF0000"/>
                           </a:solidFill>
@@ -8266,7 +8266,7 @@
                           <m:sSub>
                             <m:sSubPr>
                               <m:ctrlPr>
-                                <a:rPr lang="zh-HK" altLang="en-US" i="1">
+                                <a:rPr lang="en-HK" altLang="zh-HK" b="0" i="1" smtClean="0">
                                   <a:solidFill>
                                     <a:srgbClr val="FF0000"/>
                                   </a:solidFill>
@@ -8277,14 +8277,14 @@
                             </m:sSubPr>
                             <m:e>
                               <m:r>
-                                <a:rPr lang="zh-HK" altLang="en-US" i="1">
+                                <a:rPr lang="en-HK" altLang="zh-HK" b="0" i="1" smtClean="0">
                                   <a:solidFill>
                                     <a:srgbClr val="FF0000"/>
                                   </a:solidFill>
                                   <a:latin typeface="Cambria Math" panose="02040503050406030204" pitchFamily="18" charset="0"/>
                                   <a:cs typeface="Times New Roman" panose="02020603050405020304" pitchFamily="18" charset="0"/>
                                 </a:rPr>
-                                <m:t>𝜏</m:t>
+                                <m:t>𝑡</m:t>
                               </m:r>
                             </m:e>
                             <m:sub>
@@ -8310,7 +8310,7 @@
             </p:txBody>
           </p:sp>
         </mc:Choice>
-        <mc:Fallback xmlns="">
+        <mc:Fallback>
           <p:sp>
             <p:nvSpPr>
               <p:cNvPr id="9" name="矩形 10">
@@ -8327,8 +8327,8 @@
             </p:nvSpPr>
             <p:spPr>
               <a:xfrm rot="20057880">
-                <a:off x="9216154" y="4135995"/>
-                <a:ext cx="800797" cy="369332"/>
+                <a:off x="9228273" y="4076035"/>
+                <a:ext cx="776559" cy="369332"/>
               </a:xfrm>
               <a:prstGeom prst="rect">
                 <a:avLst/>
@@ -8345,7 +8345,7 @@
               <a:lstStyle/>
               <a:p>
                 <a:r>
-                  <a:rPr lang="zh-Hans-HK" altLang="en-US">
+                  <a:rPr lang="zh-CN" altLang="en-US">
                     <a:noFill/>
                   </a:rPr>
                   <a:t> </a:t>
@@ -8355,8 +8355,8 @@
           </p:sp>
         </mc:Fallback>
       </mc:AlternateContent>
-      <mc:AlternateContent xmlns:mc="http://schemas.openxmlformats.org/markup-compatibility/2006" xmlns:a14="http://schemas.microsoft.com/office/drawing/2010/main">
-        <mc:Choice Requires="a14">
+      <mc:AlternateContent xmlns:mc="http://schemas.openxmlformats.org/markup-compatibility/2006">
+        <mc:Choice xmlns:a14="http://schemas.microsoft.com/office/drawing/2010/main" Requires="a14">
           <p:sp>
             <p:nvSpPr>
               <p:cNvPr id="11" name="矩形 11">
@@ -8371,7 +8371,7 @@
             </p:nvSpPr>
             <p:spPr>
               <a:xfrm>
-                <a:off x="11268862" y="2259876"/>
+                <a:off x="11133952" y="2259876"/>
                 <a:ext cx="923138" cy="369332"/>
               </a:xfrm>
               <a:prstGeom prst="rect">
@@ -8429,7 +8429,7 @@
                           <m:sSub>
                             <m:sSubPr>
                               <m:ctrlPr>
-                                <a:rPr lang="zh-HK" altLang="en-US" i="1">
+                                <a:rPr lang="en-HK" altLang="zh-HK" b="0" i="1" smtClean="0">
                                   <a:latin typeface="Cambria Math" panose="02040503050406030204" pitchFamily="18" charset="0"/>
                                   <a:cs typeface="Times New Roman" panose="02020603050405020304" pitchFamily="18" charset="0"/>
                                 </a:rPr>
@@ -8437,11 +8437,11 @@
                             </m:sSubPr>
                             <m:e>
                               <m:r>
-                                <a:rPr lang="zh-HK" altLang="en-US" i="1">
+                                <a:rPr lang="en-HK" altLang="zh-HK" b="0" i="1" smtClean="0">
                                   <a:latin typeface="Cambria Math" panose="02040503050406030204" pitchFamily="18" charset="0"/>
                                   <a:cs typeface="Times New Roman" panose="02020603050405020304" pitchFamily="18" charset="0"/>
                                 </a:rPr>
-                                <m:t>𝜏</m:t>
+                                <m:t>𝑡</m:t>
                               </m:r>
                             </m:e>
                             <m:sub>
@@ -8464,7 +8464,7 @@
             </p:txBody>
           </p:sp>
         </mc:Choice>
-        <mc:Fallback xmlns="">
+        <mc:Fallback>
           <p:sp>
             <p:nvSpPr>
               <p:cNvPr id="11" name="矩形 11">
@@ -8481,7 +8481,7 @@
             </p:nvSpPr>
             <p:spPr>
               <a:xfrm>
-                <a:off x="11268862" y="2259876"/>
+                <a:off x="11133952" y="2259876"/>
                 <a:ext cx="923138" cy="369332"/>
               </a:xfrm>
               <a:prstGeom prst="rect">
@@ -8499,7 +8499,7 @@
               <a:lstStyle/>
               <a:p>
                 <a:r>
-                  <a:rPr lang="zh-Hans-HK" altLang="en-US">
+                  <a:rPr lang="zh-CN" altLang="en-US">
                     <a:noFill/>
                   </a:rPr>
                   <a:t> </a:t>
@@ -8820,8 +8820,8 @@
           </a:p>
         </p:txBody>
       </p:sp>
-      <mc:AlternateContent xmlns:mc="http://schemas.openxmlformats.org/markup-compatibility/2006">
-        <mc:Choice xmlns:a14="http://schemas.microsoft.com/office/drawing/2010/main" Requires="a14">
+      <mc:AlternateContent xmlns:mc="http://schemas.openxmlformats.org/markup-compatibility/2006" xmlns:a14="http://schemas.microsoft.com/office/drawing/2010/main">
+        <mc:Choice Requires="a14">
           <p:sp>
             <p:nvSpPr>
               <p:cNvPr id="3" name="Content Placeholder 2">
@@ -8939,7 +8939,7 @@
                         <m:d>
                           <m:dPr>
                             <m:ctrlPr>
-                              <a:rPr lang="en-HK" altLang="zh-Hans-HK" i="1" smtClean="0">
+                              <a:rPr lang="en-HK" altLang="zh-Hans-HK" b="0" i="1" smtClean="0">
                                 <a:latin typeface="Cambria Math" panose="02040503050406030204" pitchFamily="18" charset="0"/>
                                 <a:cs typeface="Times New Roman" panose="02020603050405020304" pitchFamily="18" charset="0"/>
                               </a:rPr>
@@ -9044,7 +9044,7 @@
                         <m:d>
                           <m:dPr>
                             <m:ctrlPr>
-                              <a:rPr lang="en-HK" altLang="zh-Hans-HK" i="1" smtClean="0">
+                              <a:rPr lang="en-HK" altLang="zh-Hans-HK" b="0" i="1" smtClean="0">
                                 <a:latin typeface="Cambria Math" panose="02040503050406030204" pitchFamily="18" charset="0"/>
                                 <a:cs typeface="Times New Roman" panose="02020603050405020304" pitchFamily="18" charset="0"/>
                               </a:rPr>
@@ -9149,7 +9149,7 @@
                         <m:d>
                           <m:dPr>
                             <m:ctrlPr>
-                              <a:rPr lang="en-HK" altLang="zh-Hans-HK" i="1" smtClean="0">
+                              <a:rPr lang="en-HK" altLang="zh-Hans-HK" b="0" i="1" smtClean="0">
                                 <a:latin typeface="Cambria Math" panose="02040503050406030204" pitchFamily="18" charset="0"/>
                                 <a:cs typeface="Times New Roman" panose="02020603050405020304" pitchFamily="18" charset="0"/>
                               </a:rPr>
@@ -9373,7 +9373,7 @@
             </p:txBody>
           </p:sp>
         </mc:Choice>
-        <mc:Fallback>
+        <mc:Fallback xmlns="">
           <p:sp>
             <p:nvSpPr>
               <p:cNvPr id="3" name="Content Placeholder 2">
@@ -9447,8 +9447,8 @@
           </a:prstGeom>
         </p:spPr>
       </p:pic>
-      <mc:AlternateContent xmlns:mc="http://schemas.openxmlformats.org/markup-compatibility/2006">
-        <mc:Choice xmlns:a14="http://schemas.microsoft.com/office/drawing/2010/main" Requires="a14">
+      <mc:AlternateContent xmlns:mc="http://schemas.openxmlformats.org/markup-compatibility/2006" xmlns:a14="http://schemas.microsoft.com/office/drawing/2010/main">
+        <mc:Choice Requires="a14">
           <p:sp>
             <p:nvSpPr>
               <p:cNvPr id="7" name="TextBox 6">
@@ -9893,7 +9893,7 @@
                               <m:d>
                                 <m:dPr>
                                   <m:ctrlPr>
-                                    <a:rPr lang="en-HK" altLang="zh-Hans-HK" sz="2200" i="1" smtClean="0">
+                                    <a:rPr lang="en-HK" altLang="zh-Hans-HK" sz="2200" b="0" i="1" smtClean="0">
                                       <a:latin typeface="Cambria Math" panose="02040503050406030204" pitchFamily="18" charset="0"/>
                                       <a:ea typeface="Cambria Math" panose="02040503050406030204" pitchFamily="18" charset="0"/>
                                       <a:cs typeface="Times New Roman" panose="02020603050405020304" pitchFamily="18" charset="0"/>
@@ -9935,7 +9935,7 @@
                                   <m:d>
                                     <m:dPr>
                                       <m:ctrlPr>
-                                        <a:rPr lang="en-HK" altLang="zh-Hans-HK" sz="2200" i="1" smtClean="0">
+                                        <a:rPr lang="en-HK" altLang="zh-Hans-HK" sz="2200" b="0" i="1" smtClean="0">
                                           <a:latin typeface="Cambria Math" panose="02040503050406030204" pitchFamily="18" charset="0"/>
                                           <a:cs typeface="Times New Roman" panose="02020603050405020304" pitchFamily="18" charset="0"/>
                                         </a:rPr>
@@ -10046,8 +10046,9 @@
                                   <m:d>
                                     <m:dPr>
                                       <m:ctrlPr>
-                                        <a:rPr lang="en-HK" altLang="zh-Hans-HK" sz="2200" i="1" smtClean="0">
+                                        <a:rPr lang="en-HK" altLang="zh-Hans-HK" sz="2400" i="1">
                                           <a:latin typeface="Cambria Math" panose="02040503050406030204" pitchFamily="18" charset="0"/>
+                                          <a:ea typeface="Cambria Math" panose="02040503050406030204" pitchFamily="18" charset="0"/>
                                           <a:cs typeface="Times New Roman" panose="02020603050405020304" pitchFamily="18" charset="0"/>
                                         </a:rPr>
                                       </m:ctrlPr>
@@ -10194,7 +10195,7 @@
             </p:txBody>
           </p:sp>
         </mc:Choice>
-        <mc:Fallback>
+        <mc:Fallback xmlns="">
           <p:sp>
             <p:nvSpPr>
               <p:cNvPr id="7" name="TextBox 6">
